--- a/ppt.pptx
+++ b/ppt.pptx
@@ -5,13 +5,14 @@
     <p:sldMasterId id="2147483648" r:id="rId1"/>
   </p:sldMasterIdLst>
   <p:notesMasterIdLst>
-    <p:notesMasterId r:id="rId6"/>
+    <p:notesMasterId r:id="rId7"/>
   </p:notesMasterIdLst>
   <p:sldIdLst>
     <p:sldId id="261" r:id="rId2"/>
     <p:sldId id="258" r:id="rId3"/>
     <p:sldId id="259" r:id="rId4"/>
     <p:sldId id="260" r:id="rId5"/>
+    <p:sldId id="262" r:id="rId6"/>
   </p:sldIdLst>
   <p:sldSz cx="12192000" cy="6858000"/>
   <p:notesSz cx="6858000" cy="9144000"/>
@@ -3864,7 +3865,7 @@
         <p:spPr>
           <a:xfrm>
             <a:off x="144178" y="93626"/>
-            <a:ext cx="1261884" cy="523220"/>
+            <a:ext cx="1620957" cy="523220"/>
           </a:xfrm>
           <a:prstGeom prst="rect">
             <a:avLst/>
@@ -3879,7 +3880,7 @@
           <a:p>
             <a:r>
               <a:rPr lang="zh-CN" altLang="en-US" sz="2800" b="1" dirty="0"/>
-              <a:t>技术栈</a:t>
+              <a:t>项目背景</a:t>
             </a:r>
           </a:p>
         </p:txBody>
@@ -3898,7 +3899,7 @@
         </p:nvSpPr>
         <p:spPr>
           <a:xfrm>
-            <a:off x="2587925" y="1754038"/>
+            <a:off x="615191" y="890438"/>
             <a:ext cx="3268844" cy="1754326"/>
           </a:xfrm>
           <a:prstGeom prst="rect">
@@ -10205,6 +10206,71 @@
     <p:extLst>
       <p:ext uri="{BB962C8B-B14F-4D97-AF65-F5344CB8AC3E}">
         <p14:creationId xmlns:p14="http://schemas.microsoft.com/office/powerpoint/2010/main" val="198466935"/>
+      </p:ext>
+    </p:extLst>
+  </p:cSld>
+  <p:clrMapOvr>
+    <a:masterClrMapping/>
+  </p:clrMapOvr>
+</p:sld>
+</file>
+
+<file path=ppt/slides/slide5.xml><?xml version="1.0" encoding="utf-8"?>
+<p:sld xmlns:a="http://schemas.openxmlformats.org/drawingml/2006/main" xmlns:r="http://schemas.openxmlformats.org/officeDocument/2006/relationships" xmlns:p="http://schemas.openxmlformats.org/presentationml/2006/main">
+  <p:cSld>
+    <p:spTree>
+      <p:nvGrpSpPr>
+        <p:cNvPr id="1" name=""/>
+        <p:cNvGrpSpPr/>
+        <p:nvPr/>
+      </p:nvGrpSpPr>
+      <p:grpSpPr>
+        <a:xfrm>
+          <a:off x="0" y="0"/>
+          <a:ext cx="0" cy="0"/>
+          <a:chOff x="0" y="0"/>
+          <a:chExt cx="0" cy="0"/>
+        </a:xfrm>
+      </p:grpSpPr>
+      <p:sp>
+        <p:nvSpPr>
+          <p:cNvPr id="30" name="文本框 29">
+            <a:extLst>
+              <a:ext uri="{FF2B5EF4-FFF2-40B4-BE49-F238E27FC236}">
+                <a16:creationId xmlns:a16="http://schemas.microsoft.com/office/drawing/2014/main" id="{476DCF06-EF95-9693-64DC-5141597B674E}"/>
+              </a:ext>
+            </a:extLst>
+          </p:cNvPr>
+          <p:cNvSpPr txBox="1"/>
+          <p:nvPr/>
+        </p:nvSpPr>
+        <p:spPr>
+          <a:xfrm>
+            <a:off x="144178" y="93626"/>
+            <a:ext cx="902811" cy="523220"/>
+          </a:xfrm>
+          <a:prstGeom prst="rect">
+            <a:avLst/>
+          </a:prstGeom>
+          <a:noFill/>
+        </p:spPr>
+        <p:txBody>
+          <a:bodyPr wrap="none" rtlCol="0">
+            <a:spAutoFit/>
+          </a:bodyPr>
+          <a:lstStyle/>
+          <a:p>
+            <a:r>
+              <a:rPr lang="zh-CN" altLang="en-US" sz="2800" b="1" dirty="0"/>
+              <a:t>分工</a:t>
+            </a:r>
+          </a:p>
+        </p:txBody>
+      </p:sp>
+    </p:spTree>
+    <p:extLst>
+      <p:ext uri="{BB962C8B-B14F-4D97-AF65-F5344CB8AC3E}">
+        <p14:creationId xmlns:p14="http://schemas.microsoft.com/office/powerpoint/2010/main" val="1298528559"/>
       </p:ext>
     </p:extLst>
   </p:cSld>

--- a/ppt.pptx
+++ b/ppt.pptx
@@ -5,14 +5,15 @@
     <p:sldMasterId id="2147483648" r:id="rId1"/>
   </p:sldMasterIdLst>
   <p:notesMasterIdLst>
-    <p:notesMasterId r:id="rId7"/>
+    <p:notesMasterId r:id="rId8"/>
   </p:notesMasterIdLst>
   <p:sldIdLst>
     <p:sldId id="261" r:id="rId2"/>
     <p:sldId id="258" r:id="rId3"/>
     <p:sldId id="259" r:id="rId4"/>
     <p:sldId id="260" r:id="rId5"/>
-    <p:sldId id="262" r:id="rId6"/>
+    <p:sldId id="263" r:id="rId6"/>
+    <p:sldId id="262" r:id="rId7"/>
   </p:sldIdLst>
   <p:sldSz cx="12192000" cy="6858000"/>
   <p:notesSz cx="6858000" cy="9144000"/>
@@ -201,7 +202,7 @@
           <a:p>
             <a:fld id="{C19A81FB-4F36-465C-B86A-31257373A925}" type="datetimeFigureOut">
               <a:rPr lang="zh-CN" altLang="en-US" smtClean="0"/>
-              <a:t>2026/6/16</a:t>
+              <a:t>2026/6/17</a:t>
             </a:fld>
             <a:endParaRPr lang="zh-CN" altLang="en-US"/>
           </a:p>
@@ -783,7 +784,7 @@
           <a:p>
             <a:fld id="{BA261C6D-70BF-46ED-B910-0A67E38F5F77}" type="datetimeFigureOut">
               <a:rPr lang="zh-CN" altLang="en-US" smtClean="0"/>
-              <a:t>2026/6/16</a:t>
+              <a:t>2026/6/17</a:t>
             </a:fld>
             <a:endParaRPr lang="zh-CN" altLang="en-US"/>
           </a:p>
@@ -981,7 +982,7 @@
           <a:p>
             <a:fld id="{BA261C6D-70BF-46ED-B910-0A67E38F5F77}" type="datetimeFigureOut">
               <a:rPr lang="zh-CN" altLang="en-US" smtClean="0"/>
-              <a:t>2026/6/16</a:t>
+              <a:t>2026/6/17</a:t>
             </a:fld>
             <a:endParaRPr lang="zh-CN" altLang="en-US"/>
           </a:p>
@@ -1189,7 +1190,7 @@
           <a:p>
             <a:fld id="{BA261C6D-70BF-46ED-B910-0A67E38F5F77}" type="datetimeFigureOut">
               <a:rPr lang="zh-CN" altLang="en-US" smtClean="0"/>
-              <a:t>2026/6/16</a:t>
+              <a:t>2026/6/17</a:t>
             </a:fld>
             <a:endParaRPr lang="zh-CN" altLang="en-US"/>
           </a:p>
@@ -1387,7 +1388,7 @@
           <a:p>
             <a:fld id="{BA261C6D-70BF-46ED-B910-0A67E38F5F77}" type="datetimeFigureOut">
               <a:rPr lang="zh-CN" altLang="en-US" smtClean="0"/>
-              <a:t>2026/6/16</a:t>
+              <a:t>2026/6/17</a:t>
             </a:fld>
             <a:endParaRPr lang="zh-CN" altLang="en-US"/>
           </a:p>
@@ -1662,7 +1663,7 @@
           <a:p>
             <a:fld id="{BA261C6D-70BF-46ED-B910-0A67E38F5F77}" type="datetimeFigureOut">
               <a:rPr lang="zh-CN" altLang="en-US" smtClean="0"/>
-              <a:t>2026/6/16</a:t>
+              <a:t>2026/6/17</a:t>
             </a:fld>
             <a:endParaRPr lang="zh-CN" altLang="en-US"/>
           </a:p>
@@ -1927,7 +1928,7 @@
           <a:p>
             <a:fld id="{BA261C6D-70BF-46ED-B910-0A67E38F5F77}" type="datetimeFigureOut">
               <a:rPr lang="zh-CN" altLang="en-US" smtClean="0"/>
-              <a:t>2026/6/16</a:t>
+              <a:t>2026/6/17</a:t>
             </a:fld>
             <a:endParaRPr lang="zh-CN" altLang="en-US"/>
           </a:p>
@@ -2339,7 +2340,7 @@
           <a:p>
             <a:fld id="{BA261C6D-70BF-46ED-B910-0A67E38F5F77}" type="datetimeFigureOut">
               <a:rPr lang="zh-CN" altLang="en-US" smtClean="0"/>
-              <a:t>2026/6/16</a:t>
+              <a:t>2026/6/17</a:t>
             </a:fld>
             <a:endParaRPr lang="zh-CN" altLang="en-US"/>
           </a:p>
@@ -2480,7 +2481,7 @@
           <a:p>
             <a:fld id="{BA261C6D-70BF-46ED-B910-0A67E38F5F77}" type="datetimeFigureOut">
               <a:rPr lang="zh-CN" altLang="en-US" smtClean="0"/>
-              <a:t>2026/6/16</a:t>
+              <a:t>2026/6/17</a:t>
             </a:fld>
             <a:endParaRPr lang="zh-CN" altLang="en-US"/>
           </a:p>
@@ -2593,7 +2594,7 @@
           <a:p>
             <a:fld id="{BA261C6D-70BF-46ED-B910-0A67E38F5F77}" type="datetimeFigureOut">
               <a:rPr lang="zh-CN" altLang="en-US" smtClean="0"/>
-              <a:t>2026/6/16</a:t>
+              <a:t>2026/6/17</a:t>
             </a:fld>
             <a:endParaRPr lang="zh-CN" altLang="en-US"/>
           </a:p>
@@ -2904,7 +2905,7 @@
           <a:p>
             <a:fld id="{BA261C6D-70BF-46ED-B910-0A67E38F5F77}" type="datetimeFigureOut">
               <a:rPr lang="zh-CN" altLang="en-US" smtClean="0"/>
-              <a:t>2026/6/16</a:t>
+              <a:t>2026/6/17</a:t>
             </a:fld>
             <a:endParaRPr lang="zh-CN" altLang="en-US"/>
           </a:p>
@@ -3192,7 +3193,7 @@
           <a:p>
             <a:fld id="{BA261C6D-70BF-46ED-B910-0A67E38F5F77}" type="datetimeFigureOut">
               <a:rPr lang="zh-CN" altLang="en-US" smtClean="0"/>
-              <a:t>2026/6/16</a:t>
+              <a:t>2026/6/17</a:t>
             </a:fld>
             <a:endParaRPr lang="zh-CN" altLang="en-US"/>
           </a:p>
@@ -3433,7 +3434,7 @@
           <a:p>
             <a:fld id="{BA261C6D-70BF-46ED-B910-0A67E38F5F77}" type="datetimeFigureOut">
               <a:rPr lang="zh-CN" altLang="en-US" smtClean="0"/>
-              <a:t>2026/6/16</a:t>
+              <a:t>2026/6/17</a:t>
             </a:fld>
             <a:endParaRPr lang="zh-CN" altLang="en-US"/>
           </a:p>
@@ -3899,8 +3900,8 @@
         </p:nvSpPr>
         <p:spPr>
           <a:xfrm>
-            <a:off x="615191" y="890438"/>
-            <a:ext cx="3268844" cy="1754326"/>
+            <a:off x="144178" y="660401"/>
+            <a:ext cx="4020652" cy="2031325"/>
           </a:xfrm>
           <a:prstGeom prst="rect">
             <a:avLst/>
@@ -3914,6 +3915,13 @@
           <a:lstStyle/>
           <a:p>
             <a:r>
+              <a:rPr lang="zh-CN" altLang="en-US" b="1" dirty="0"/>
+              <a:t>技术栈</a:t>
+            </a:r>
+            <a:endParaRPr lang="en-US" altLang="zh-CN" b="1" dirty="0"/>
+          </a:p>
+          <a:p>
+            <a:r>
               <a:rPr lang="zh-CN" altLang="en-US" dirty="0"/>
               <a:t>前端：</a:t>
             </a:r>
@@ -3959,7 +3967,23 @@
           <a:p>
             <a:r>
               <a:rPr lang="zh-CN" altLang="en-US" dirty="0"/>
-              <a:t>模型微调： </a:t>
+              <a:t>模型接入： </a:t>
+            </a:r>
+            <a:r>
+              <a:rPr lang="en-US" altLang="zh-CN" dirty="0" err="1"/>
+              <a:t>Ollama</a:t>
+            </a:r>
+            <a:r>
+              <a:rPr lang="en-US" altLang="zh-CN" dirty="0"/>
+              <a:t>/</a:t>
+            </a:r>
+            <a:r>
+              <a:rPr lang="en-US" altLang="zh-CN" dirty="0" err="1"/>
+              <a:t>Openai</a:t>
+            </a:r>
+            <a:r>
+              <a:rPr lang="en-US" altLang="zh-CN" dirty="0"/>
+              <a:t> + </a:t>
             </a:r>
             <a:r>
               <a:rPr lang="en-US" altLang="zh-CN" dirty="0" err="1"/>
@@ -3980,13 +4004,239 @@
               <a:rPr lang="en-US" altLang="zh-CN" dirty="0" err="1"/>
               <a:t>Typescript+NodeJS</a:t>
             </a:r>
-            <a:endParaRPr lang="en-US" altLang="zh-CN" dirty="0"/>
+            <a:r>
+              <a:rPr lang="en-US" altLang="zh-CN" dirty="0"/>
+              <a:t> + MCP SDK</a:t>
+            </a:r>
           </a:p>
           <a:p>
             <a:endParaRPr lang="zh-CN" altLang="en-US" dirty="0"/>
           </a:p>
         </p:txBody>
       </p:sp>
+      <p:sp>
+        <p:nvSpPr>
+          <p:cNvPr id="2" name="文本框 1">
+            <a:extLst>
+              <a:ext uri="{FF2B5EF4-FFF2-40B4-BE49-F238E27FC236}">
+                <a16:creationId xmlns:a16="http://schemas.microsoft.com/office/drawing/2014/main" id="{64A34E09-8BF0-64CF-6A7F-16F00ECE5B28}"/>
+              </a:ext>
+            </a:extLst>
+          </p:cNvPr>
+          <p:cNvSpPr txBox="1"/>
+          <p:nvPr/>
+        </p:nvSpPr>
+        <p:spPr>
+          <a:xfrm>
+            <a:off x="184435" y="3904889"/>
+            <a:ext cx="8982569" cy="2585323"/>
+          </a:xfrm>
+          <a:prstGeom prst="rect">
+            <a:avLst/>
+          </a:prstGeom>
+          <a:noFill/>
+        </p:spPr>
+        <p:txBody>
+          <a:bodyPr wrap="square" rtlCol="0">
+            <a:spAutoFit/>
+          </a:bodyPr>
+          <a:lstStyle/>
+          <a:p>
+            <a:r>
+              <a:rPr lang="zh-CN" altLang="en-US" b="1" dirty="0"/>
+              <a:t>项目简介</a:t>
+            </a:r>
+            <a:endParaRPr lang="en-US" altLang="zh-CN" b="1" dirty="0"/>
+          </a:p>
+          <a:p>
+            <a:endParaRPr lang="en-US" altLang="zh-CN" b="1" dirty="0"/>
+          </a:p>
+          <a:p>
+            <a:r>
+              <a:rPr lang="zh-CN" altLang="en-US" dirty="0"/>
+              <a:t>本项目是一个面向 </a:t>
+            </a:r>
+            <a:r>
+              <a:rPr lang="en-US" altLang="zh-CN" dirty="0"/>
+              <a:t>Steam </a:t>
+            </a:r>
+            <a:r>
+              <a:rPr lang="zh-CN" altLang="en-US" dirty="0"/>
+              <a:t>用户的本地 </a:t>
+            </a:r>
+            <a:r>
+              <a:rPr lang="en-US" altLang="zh-CN" dirty="0"/>
+              <a:t>AI </a:t>
+            </a:r>
+            <a:r>
+              <a:rPr lang="zh-CN" altLang="en-US" dirty="0"/>
+              <a:t>游戏助手系统，前端基于 </a:t>
+            </a:r>
+            <a:r>
+              <a:rPr lang="en-US" altLang="zh-CN" dirty="0"/>
+              <a:t>Vue 2 </a:t>
+            </a:r>
+            <a:r>
+              <a:rPr lang="zh-CN" altLang="en-US" dirty="0"/>
+              <a:t>构建交互界面，支持多用户档案切换、独立 </a:t>
+            </a:r>
+            <a:r>
+              <a:rPr lang="en-US" altLang="zh-CN" dirty="0"/>
+              <a:t>AI </a:t>
+            </a:r>
+            <a:r>
+              <a:rPr lang="zh-CN" altLang="en-US" dirty="0"/>
+              <a:t>配置、</a:t>
+            </a:r>
+            <a:r>
+              <a:rPr lang="en-US" altLang="zh-CN" dirty="0"/>
+              <a:t>Steam </a:t>
+            </a:r>
+            <a:r>
+              <a:rPr lang="zh-CN" altLang="en-US" dirty="0"/>
+              <a:t>数据概览和知识库管理；后端基于 </a:t>
+            </a:r>
+            <a:r>
+              <a:rPr lang="en-US" altLang="zh-CN" dirty="0" err="1"/>
+              <a:t>FastAPI</a:t>
+            </a:r>
+            <a:r>
+              <a:rPr lang="en-US" altLang="zh-CN" dirty="0"/>
+              <a:t> </a:t>
+            </a:r>
+            <a:r>
+              <a:rPr lang="zh-CN" altLang="en-US" dirty="0"/>
+              <a:t>提供用户资料、聊天、</a:t>
+            </a:r>
+            <a:r>
+              <a:rPr lang="en-US" altLang="zh-CN" dirty="0"/>
+              <a:t>Steam </a:t>
+            </a:r>
+            <a:r>
+              <a:rPr lang="zh-CN" altLang="en-US" dirty="0"/>
+              <a:t>数据和知识库接口，并通过 </a:t>
+            </a:r>
+            <a:r>
+              <a:rPr lang="en-US" altLang="zh-CN" dirty="0" err="1"/>
+              <a:t>LangChain</a:t>
+            </a:r>
+            <a:r>
+              <a:rPr lang="zh-CN" altLang="en-US" dirty="0"/>
+              <a:t>、</a:t>
+            </a:r>
+            <a:r>
+              <a:rPr lang="en-US" altLang="zh-CN" dirty="0"/>
+              <a:t>Chroma </a:t>
+            </a:r>
+            <a:r>
+              <a:rPr lang="zh-CN" altLang="en-US" dirty="0"/>
+              <a:t>与 </a:t>
+            </a:r>
+            <a:r>
+              <a:rPr lang="en-US" altLang="zh-CN" dirty="0" err="1"/>
+              <a:t>Ollama</a:t>
+            </a:r>
+            <a:r>
+              <a:rPr lang="en-US" altLang="zh-CN" dirty="0"/>
+              <a:t>/OpenAI-compatible </a:t>
+            </a:r>
+            <a:r>
+              <a:rPr lang="zh-CN" altLang="en-US" dirty="0"/>
+              <a:t>模型实现 </a:t>
+            </a:r>
+            <a:r>
+              <a:rPr lang="en-US" altLang="zh-CN" dirty="0"/>
+              <a:t>RAG </a:t>
+            </a:r>
+            <a:r>
+              <a:rPr lang="zh-CN" altLang="en-US" dirty="0"/>
+              <a:t>检索增强对话；同时项目内置 </a:t>
+            </a:r>
+            <a:r>
+              <a:rPr lang="en-US" altLang="zh-CN" dirty="0"/>
+              <a:t>TypeScript MCP Server</a:t>
+            </a:r>
+            <a:r>
+              <a:rPr lang="zh-CN" altLang="en-US" dirty="0"/>
+              <a:t>，将 </a:t>
+            </a:r>
+            <a:r>
+              <a:rPr lang="en-US" altLang="zh-CN" dirty="0"/>
+              <a:t>Steam Web API</a:t>
+            </a:r>
+            <a:r>
+              <a:rPr lang="zh-CN" altLang="en-US" dirty="0"/>
+              <a:t>、本地 </a:t>
+            </a:r>
+            <a:r>
+              <a:rPr lang="en-US" altLang="zh-CN" dirty="0"/>
+              <a:t>Steam </a:t>
+            </a:r>
+            <a:r>
+              <a:rPr lang="zh-CN" altLang="en-US" dirty="0"/>
+              <a:t>文件、商店、库存、好友和游戏启动能力封装为 </a:t>
+            </a:r>
+            <a:r>
+              <a:rPr lang="en-US" altLang="zh-CN" dirty="0"/>
+              <a:t>MCP </a:t>
+            </a:r>
+            <a:r>
+              <a:rPr lang="zh-CN" altLang="en-US" dirty="0"/>
+              <a:t>工具，使 </a:t>
+            </a:r>
+            <a:r>
+              <a:rPr lang="en-US" altLang="zh-CN" dirty="0"/>
+              <a:t>Agent </a:t>
+            </a:r>
+            <a:r>
+              <a:rPr lang="zh-CN" altLang="en-US" dirty="0"/>
+              <a:t>能在对话中按需调用真实 </a:t>
+            </a:r>
+            <a:r>
+              <a:rPr lang="en-US" altLang="zh-CN" dirty="0"/>
+              <a:t>Steam </a:t>
+            </a:r>
+            <a:r>
+              <a:rPr lang="zh-CN" altLang="en-US" dirty="0"/>
+              <a:t>数据与本地功能。</a:t>
+            </a:r>
+            <a:endParaRPr lang="en-US" altLang="zh-CN" b="1" dirty="0"/>
+          </a:p>
+          <a:p>
+            <a:endParaRPr lang="zh-CN" altLang="en-US" b="1" dirty="0"/>
+          </a:p>
+        </p:txBody>
+      </p:sp>
+      <p:pic>
+        <p:nvPicPr>
+          <p:cNvPr id="3" name="图片 2">
+            <a:extLst>
+              <a:ext uri="{FF2B5EF4-FFF2-40B4-BE49-F238E27FC236}">
+                <a16:creationId xmlns:a16="http://schemas.microsoft.com/office/drawing/2014/main" id="{FBFDA41F-DFF8-8ED6-CE98-55144ADD235E}"/>
+              </a:ext>
+            </a:extLst>
+          </p:cNvPr>
+          <p:cNvPicPr>
+            <a:picLocks noChangeAspect="1"/>
+          </p:cNvPicPr>
+          <p:nvPr/>
+        </p:nvPicPr>
+        <p:blipFill>
+          <a:blip r:embed="rId2"/>
+          <a:stretch>
+            <a:fillRect/>
+          </a:stretch>
+        </p:blipFill>
+        <p:spPr>
+          <a:xfrm>
+            <a:off x="4106174" y="0"/>
+            <a:ext cx="8011064" cy="4158340"/>
+          </a:xfrm>
+          <a:prstGeom prst="rect">
+            <a:avLst/>
+          </a:prstGeom>
+        </p:spPr>
+      </p:pic>
     </p:spTree>
     <p:extLst>
       <p:ext uri="{BB962C8B-B14F-4D97-AF65-F5344CB8AC3E}">
@@ -9012,6 +9262,49 @@
           </a:p>
         </p:txBody>
       </p:sp>
+      <p:sp>
+        <p:nvSpPr>
+          <p:cNvPr id="7" name="文本框 6">
+            <a:extLst>
+              <a:ext uri="{FF2B5EF4-FFF2-40B4-BE49-F238E27FC236}">
+                <a16:creationId xmlns:a16="http://schemas.microsoft.com/office/drawing/2014/main" id="{0277F089-CDE8-CB8D-589B-924F38557F66}"/>
+              </a:ext>
+            </a:extLst>
+          </p:cNvPr>
+          <p:cNvSpPr txBox="1"/>
+          <p:nvPr/>
+        </p:nvSpPr>
+        <p:spPr>
+          <a:xfrm>
+            <a:off x="2233680" y="5370408"/>
+            <a:ext cx="1133644" cy="246221"/>
+          </a:xfrm>
+          <a:prstGeom prst="rect">
+            <a:avLst/>
+          </a:prstGeom>
+          <a:noFill/>
+        </p:spPr>
+        <p:txBody>
+          <a:bodyPr wrap="none" rtlCol="0">
+            <a:spAutoFit/>
+          </a:bodyPr>
+          <a:lstStyle/>
+          <a:p>
+            <a:r>
+              <a:rPr lang="zh-CN" altLang="en-US" sz="900" dirty="0"/>
+              <a:t>返回工具</a:t>
+            </a:r>
+            <a:r>
+              <a:rPr lang="zh-CN" altLang="en-US" sz="1000" dirty="0"/>
+              <a:t>调用</a:t>
+            </a:r>
+            <a:r>
+              <a:rPr lang="zh-CN" altLang="en-US" sz="900" dirty="0"/>
+              <a:t>结果</a:t>
+            </a:r>
+          </a:p>
+        </p:txBody>
+      </p:sp>
     </p:spTree>
     <p:extLst>
       <p:ext uri="{BB962C8B-B14F-4D97-AF65-F5344CB8AC3E}">
@@ -10247,7 +10540,7 @@
         <p:spPr>
           <a:xfrm>
             <a:off x="144178" y="93626"/>
-            <a:ext cx="902811" cy="523220"/>
+            <a:ext cx="2738250" cy="523220"/>
           </a:xfrm>
           <a:prstGeom prst="rect">
             <a:avLst/>
@@ -10262,7 +10555,300 @@
           <a:p>
             <a:r>
               <a:rPr lang="zh-CN" altLang="en-US" sz="2800" b="1" dirty="0"/>
+              <a:t>不足和未来工作</a:t>
+            </a:r>
+          </a:p>
+        </p:txBody>
+      </p:sp>
+      <p:sp>
+        <p:nvSpPr>
+          <p:cNvPr id="2" name="文本框 1">
+            <a:extLst>
+              <a:ext uri="{FF2B5EF4-FFF2-40B4-BE49-F238E27FC236}">
+                <a16:creationId xmlns:a16="http://schemas.microsoft.com/office/drawing/2014/main" id="{7C45BED0-BB45-EBD2-7872-FCC75BEBE160}"/>
+              </a:ext>
+            </a:extLst>
+          </p:cNvPr>
+          <p:cNvSpPr txBox="1"/>
+          <p:nvPr/>
+        </p:nvSpPr>
+        <p:spPr>
+          <a:xfrm>
+            <a:off x="144178" y="782128"/>
+            <a:ext cx="10905550" cy="3139321"/>
+          </a:xfrm>
+          <a:prstGeom prst="rect">
+            <a:avLst/>
+          </a:prstGeom>
+          <a:noFill/>
+        </p:spPr>
+        <p:txBody>
+          <a:bodyPr wrap="none" rtlCol="0">
+            <a:spAutoFit/>
+          </a:bodyPr>
+          <a:lstStyle/>
+          <a:p>
+            <a:pPr marL="342900" indent="-342900">
+              <a:buAutoNum type="arabicPeriod"/>
+            </a:pPr>
+            <a:r>
+              <a:rPr lang="zh-CN" altLang="en-US" dirty="0"/>
+              <a:t>完善上下文 </a:t>
+            </a:r>
+            <a:r>
+              <a:rPr lang="en-US" altLang="zh-CN" dirty="0"/>
+              <a:t>token </a:t>
+            </a:r>
+            <a:r>
+              <a:rPr lang="zh-CN" altLang="en-US" dirty="0"/>
+              <a:t>管理：当前 </a:t>
+            </a:r>
+            <a:r>
+              <a:rPr lang="en-US" altLang="zh-CN" dirty="0"/>
+              <a:t>token </a:t>
+            </a:r>
+            <a:r>
+              <a:rPr lang="zh-CN" altLang="en-US" dirty="0"/>
+              <a:t>预算主要覆盖用户问题、历史消息与知识库上下文，后续可将工具</a:t>
+            </a:r>
+            <a:endParaRPr lang="en-US" altLang="zh-CN" dirty="0"/>
+          </a:p>
+          <a:p>
+            <a:r>
+              <a:rPr lang="zh-CN" altLang="en-US" dirty="0"/>
+              <a:t>定义、工具调用参数和工具返回结果也纳入统一预算控制。</a:t>
+            </a:r>
+          </a:p>
+          <a:p>
+            <a:endParaRPr lang="zh-CN" altLang="en-US" dirty="0"/>
+          </a:p>
+          <a:p>
+            <a:r>
+              <a:rPr lang="en-US" altLang="zh-CN" dirty="0"/>
+              <a:t>2. </a:t>
+            </a:r>
+            <a:r>
+              <a:rPr lang="zh-CN" altLang="en-US" dirty="0"/>
+              <a:t>增强 </a:t>
+            </a:r>
+            <a:r>
+              <a:rPr lang="en-US" altLang="zh-CN" dirty="0"/>
+              <a:t>Agent </a:t>
+            </a:r>
+            <a:r>
+              <a:rPr lang="zh-CN" altLang="en-US" dirty="0"/>
+              <a:t>推理框架：后续可引入 </a:t>
+            </a:r>
+            <a:r>
+              <a:rPr lang="en-US" altLang="zh-CN" dirty="0" err="1"/>
+              <a:t>ReAct</a:t>
+            </a:r>
+            <a:r>
+              <a:rPr lang="zh-CN" altLang="en-US" dirty="0"/>
+              <a:t>、</a:t>
+            </a:r>
+            <a:r>
+              <a:rPr lang="en-US" altLang="zh-CN" dirty="0" err="1"/>
+              <a:t>CoT</a:t>
+            </a:r>
+            <a:r>
+              <a:rPr lang="en-US" altLang="zh-CN" dirty="0"/>
+              <a:t> </a:t>
+            </a:r>
+            <a:r>
+              <a:rPr lang="zh-CN" altLang="en-US" dirty="0"/>
+              <a:t>或更结构化的多步规划机制，提高复杂任务下的工具选</a:t>
+            </a:r>
+            <a:endParaRPr lang="en-US" altLang="zh-CN" dirty="0"/>
+          </a:p>
+          <a:p>
+            <a:r>
+              <a:rPr lang="zh-CN" altLang="en-US" dirty="0"/>
+              <a:t>择、调用顺序和错误恢复能力。</a:t>
+            </a:r>
+          </a:p>
+          <a:p>
+            <a:endParaRPr lang="zh-CN" altLang="en-US" dirty="0"/>
+          </a:p>
+          <a:p>
+            <a:r>
+              <a:rPr lang="en-US" altLang="zh-CN" dirty="0"/>
+              <a:t>3. </a:t>
+            </a:r>
+            <a:r>
+              <a:rPr lang="zh-CN" altLang="en-US" dirty="0"/>
+              <a:t>提升本地数据安全：对本地保存的 </a:t>
+            </a:r>
+            <a:r>
+              <a:rPr lang="en-US" altLang="zh-CN" dirty="0"/>
+              <a:t>API Key</a:t>
+            </a:r>
+            <a:r>
+              <a:rPr lang="zh-CN" altLang="en-US" dirty="0"/>
+              <a:t>、</a:t>
+            </a:r>
+            <a:r>
+              <a:rPr lang="en-US" altLang="zh-CN" dirty="0"/>
+              <a:t>Steam Key</a:t>
+            </a:r>
+            <a:r>
+              <a:rPr lang="zh-CN" altLang="en-US" dirty="0"/>
+              <a:t>、用户配置和聊天历史进行加密存储，并完善敏</a:t>
+            </a:r>
+            <a:endParaRPr lang="en-US" altLang="zh-CN" dirty="0"/>
+          </a:p>
+          <a:p>
+            <a:r>
+              <a:rPr lang="zh-CN" altLang="en-US" dirty="0"/>
+              <a:t>感日志脱敏机制。</a:t>
+            </a:r>
+          </a:p>
+          <a:p>
+            <a:endParaRPr lang="zh-CN" altLang="en-US" dirty="0"/>
+          </a:p>
+          <a:p>
+            <a:r>
+              <a:rPr lang="en-US" altLang="zh-CN" dirty="0"/>
+              <a:t>4. </a:t>
+            </a:r>
+            <a:r>
+              <a:rPr lang="zh-CN" altLang="en-US" dirty="0"/>
+              <a:t>完善工程化能力：补充自动化测试、端到端测试、</a:t>
+            </a:r>
+            <a:r>
+              <a:rPr lang="en-US" altLang="zh-CN" dirty="0"/>
+              <a:t>CI/CD</a:t>
+            </a:r>
+            <a:r>
+              <a:rPr lang="zh-CN" altLang="en-US" dirty="0"/>
+              <a:t>、</a:t>
+            </a:r>
+            <a:r>
+              <a:rPr lang="en-US" altLang="zh-CN" dirty="0"/>
+              <a:t>Docker Compose </a:t>
+            </a:r>
+            <a:r>
+              <a:rPr lang="zh-CN" altLang="en-US" dirty="0"/>
+              <a:t>一键启动，以及前后端与 </a:t>
+            </a:r>
+            <a:endParaRPr lang="en-US" altLang="zh-CN" dirty="0"/>
+          </a:p>
+          <a:p>
+            <a:r>
+              <a:rPr lang="en-US" altLang="zh-CN" dirty="0"/>
+              <a:t>MCP Server </a:t>
+            </a:r>
+            <a:r>
+              <a:rPr lang="zh-CN" altLang="en-US" dirty="0"/>
+              <a:t>的健康检查和日志面板。</a:t>
+            </a:r>
+          </a:p>
+        </p:txBody>
+      </p:sp>
+    </p:spTree>
+    <p:extLst>
+      <p:ext uri="{BB962C8B-B14F-4D97-AF65-F5344CB8AC3E}">
+        <p14:creationId xmlns:p14="http://schemas.microsoft.com/office/powerpoint/2010/main" val="1661350750"/>
+      </p:ext>
+    </p:extLst>
+  </p:cSld>
+  <p:clrMapOvr>
+    <a:masterClrMapping/>
+  </p:clrMapOvr>
+</p:sld>
+</file>
+
+<file path=ppt/slides/slide6.xml><?xml version="1.0" encoding="utf-8"?>
+<p:sld xmlns:a="http://schemas.openxmlformats.org/drawingml/2006/main" xmlns:r="http://schemas.openxmlformats.org/officeDocument/2006/relationships" xmlns:p="http://schemas.openxmlformats.org/presentationml/2006/main">
+  <p:cSld>
+    <p:spTree>
+      <p:nvGrpSpPr>
+        <p:cNvPr id="1" name=""/>
+        <p:cNvGrpSpPr/>
+        <p:nvPr/>
+      </p:nvGrpSpPr>
+      <p:grpSpPr>
+        <a:xfrm>
+          <a:off x="0" y="0"/>
+          <a:ext cx="0" cy="0"/>
+          <a:chOff x="0" y="0"/>
+          <a:chExt cx="0" cy="0"/>
+        </a:xfrm>
+      </p:grpSpPr>
+      <p:sp>
+        <p:nvSpPr>
+          <p:cNvPr id="30" name="文本框 29">
+            <a:extLst>
+              <a:ext uri="{FF2B5EF4-FFF2-40B4-BE49-F238E27FC236}">
+                <a16:creationId xmlns:a16="http://schemas.microsoft.com/office/drawing/2014/main" id="{476DCF06-EF95-9693-64DC-5141597B674E}"/>
+              </a:ext>
+            </a:extLst>
+          </p:cNvPr>
+          <p:cNvSpPr txBox="1"/>
+          <p:nvPr/>
+        </p:nvSpPr>
+        <p:spPr>
+          <a:xfrm>
+            <a:off x="144178" y="93626"/>
+            <a:ext cx="902811" cy="523220"/>
+          </a:xfrm>
+          <a:prstGeom prst="rect">
+            <a:avLst/>
+          </a:prstGeom>
+          <a:noFill/>
+        </p:spPr>
+        <p:txBody>
+          <a:bodyPr wrap="none" rtlCol="0">
+            <a:spAutoFit/>
+          </a:bodyPr>
+          <a:lstStyle/>
+          <a:p>
+            <a:r>
+              <a:rPr lang="zh-CN" altLang="en-US" sz="2800" b="1" dirty="0"/>
               <a:t>分工</a:t>
+            </a:r>
+          </a:p>
+        </p:txBody>
+      </p:sp>
+      <p:sp>
+        <p:nvSpPr>
+          <p:cNvPr id="2" name="文本框 1">
+            <a:extLst>
+              <a:ext uri="{FF2B5EF4-FFF2-40B4-BE49-F238E27FC236}">
+                <a16:creationId xmlns:a16="http://schemas.microsoft.com/office/drawing/2014/main" id="{32FAB2B6-64A7-D176-A4A0-EB5162B4747D}"/>
+              </a:ext>
+            </a:extLst>
+          </p:cNvPr>
+          <p:cNvSpPr txBox="1"/>
+          <p:nvPr/>
+        </p:nvSpPr>
+        <p:spPr>
+          <a:xfrm>
+            <a:off x="144178" y="897147"/>
+            <a:ext cx="3092513" cy="369332"/>
+          </a:xfrm>
+          <a:prstGeom prst="rect">
+            <a:avLst/>
+          </a:prstGeom>
+          <a:noFill/>
+        </p:spPr>
+        <p:txBody>
+          <a:bodyPr wrap="none" rtlCol="0">
+            <a:spAutoFit/>
+          </a:bodyPr>
+          <a:lstStyle/>
+          <a:p>
+            <a:r>
+              <a:rPr lang="zh-CN" altLang="en-US" dirty="0"/>
+              <a:t>卢昭阳：前后端，</a:t>
+            </a:r>
+            <a:r>
+              <a:rPr lang="en-US" altLang="zh-CN" dirty="0"/>
+              <a:t>Agent</a:t>
+            </a:r>
+            <a:r>
+              <a:rPr lang="zh-CN" altLang="en-US" dirty="0"/>
+              <a:t>开发</a:t>
             </a:r>
           </a:p>
         </p:txBody>

--- a/ppt.pptx
+++ b/ppt.pptx
@@ -5,15 +5,16 @@
     <p:sldMasterId id="2147483648" r:id="rId1"/>
   </p:sldMasterIdLst>
   <p:notesMasterIdLst>
-    <p:notesMasterId r:id="rId8"/>
+    <p:notesMasterId r:id="rId9"/>
   </p:notesMasterIdLst>
   <p:sldIdLst>
     <p:sldId id="261" r:id="rId2"/>
     <p:sldId id="258" r:id="rId3"/>
     <p:sldId id="259" r:id="rId4"/>
     <p:sldId id="260" r:id="rId5"/>
-    <p:sldId id="263" r:id="rId6"/>
-    <p:sldId id="262" r:id="rId7"/>
+    <p:sldId id="264" r:id="rId6"/>
+    <p:sldId id="263" r:id="rId7"/>
+    <p:sldId id="262" r:id="rId8"/>
   </p:sldIdLst>
   <p:sldSz cx="12192000" cy="6858000"/>
   <p:notesSz cx="6858000" cy="9144000"/>
@@ -628,6 +629,90 @@
     <p:extLst>
       <p:ext uri="{BB962C8B-B14F-4D97-AF65-F5344CB8AC3E}">
         <p14:creationId xmlns:p14="http://schemas.microsoft.com/office/powerpoint/2010/main" val="464049708"/>
+      </p:ext>
+    </p:extLst>
+  </p:cSld>
+  <p:clrMapOvr>
+    <a:masterClrMapping/>
+  </p:clrMapOvr>
+</p:notes>
+</file>
+
+<file path=ppt/notesSlides/notesSlide3.xml><?xml version="1.0" encoding="utf-8"?>
+<p:notes xmlns:a="http://schemas.openxmlformats.org/drawingml/2006/main" xmlns:r="http://schemas.openxmlformats.org/officeDocument/2006/relationships" xmlns:p="http://schemas.openxmlformats.org/presentationml/2006/main">
+  <p:cSld>
+    <p:spTree>
+      <p:nvGrpSpPr>
+        <p:cNvPr id="1" name=""/>
+        <p:cNvGrpSpPr/>
+        <p:nvPr/>
+      </p:nvGrpSpPr>
+      <p:grpSpPr>
+        <a:xfrm>
+          <a:off x="0" y="0"/>
+          <a:ext cx="0" cy="0"/>
+          <a:chOff x="0" y="0"/>
+          <a:chExt cx="0" cy="0"/>
+        </a:xfrm>
+      </p:grpSpPr>
+      <p:sp>
+        <p:nvSpPr>
+          <p:cNvPr id="2" name="幻灯片图像占位符 1"/>
+          <p:cNvSpPr>
+            <a:spLocks noGrp="1" noRot="1" noChangeAspect="1"/>
+          </p:cNvSpPr>
+          <p:nvPr>
+            <p:ph type="sldImg"/>
+          </p:nvPr>
+        </p:nvSpPr>
+        <p:spPr/>
+      </p:sp>
+      <p:sp>
+        <p:nvSpPr>
+          <p:cNvPr id="3" name="备注占位符 2"/>
+          <p:cNvSpPr>
+            <a:spLocks noGrp="1"/>
+          </p:cNvSpPr>
+          <p:nvPr>
+            <p:ph type="body" idx="1"/>
+          </p:nvPr>
+        </p:nvSpPr>
+        <p:spPr/>
+        <p:txBody>
+          <a:bodyPr/>
+          <a:lstStyle/>
+          <a:p>
+            <a:endParaRPr lang="zh-CN" altLang="en-US" dirty="0"/>
+          </a:p>
+        </p:txBody>
+      </p:sp>
+      <p:sp>
+        <p:nvSpPr>
+          <p:cNvPr id="4" name="灯片编号占位符 3"/>
+          <p:cNvSpPr>
+            <a:spLocks noGrp="1"/>
+          </p:cNvSpPr>
+          <p:nvPr>
+            <p:ph type="sldNum" sz="quarter" idx="5"/>
+          </p:nvPr>
+        </p:nvSpPr>
+        <p:spPr/>
+        <p:txBody>
+          <a:bodyPr/>
+          <a:lstStyle/>
+          <a:p>
+            <a:fld id="{29DB8E75-8AA8-43C4-8332-1EA0F488397E}" type="slidenum">
+              <a:rPr lang="zh-CN" altLang="en-US" smtClean="0"/>
+              <a:t>5</a:t>
+            </a:fld>
+            <a:endParaRPr lang="zh-CN" altLang="en-US"/>
+          </a:p>
+        </p:txBody>
+      </p:sp>
+    </p:spTree>
+    <p:extLst>
+      <p:ext uri="{BB962C8B-B14F-4D97-AF65-F5344CB8AC3E}">
+        <p14:creationId xmlns:p14="http://schemas.microsoft.com/office/powerpoint/2010/main" val="1044158239"/>
       </p:ext>
     </p:extLst>
   </p:cSld>
@@ -10513,6 +10598,500 @@
   <p:cSld>
     <p:spTree>
       <p:nvGrpSpPr>
+        <p:cNvPr id="1" name="">
+          <a:extLst>
+            <a:ext uri="{FF2B5EF4-FFF2-40B4-BE49-F238E27FC236}">
+              <a16:creationId xmlns:a16="http://schemas.microsoft.com/office/drawing/2014/main" id="{6AC1C5C3-4674-535B-A6FB-CBCC185BBE3A}"/>
+            </a:ext>
+          </a:extLst>
+        </p:cNvPr>
+        <p:cNvGrpSpPr/>
+        <p:nvPr/>
+      </p:nvGrpSpPr>
+      <p:grpSpPr>
+        <a:xfrm>
+          <a:off x="0" y="0"/>
+          <a:ext cx="0" cy="0"/>
+          <a:chOff x="0" y="0"/>
+          <a:chExt cx="0" cy="0"/>
+        </a:xfrm>
+      </p:grpSpPr>
+      <p:sp>
+        <p:nvSpPr>
+          <p:cNvPr id="30" name="文本框 29">
+            <a:extLst>
+              <a:ext uri="{FF2B5EF4-FFF2-40B4-BE49-F238E27FC236}">
+                <a16:creationId xmlns:a16="http://schemas.microsoft.com/office/drawing/2014/main" id="{84685482-B22D-DE51-F648-4204DC8BACCE}"/>
+              </a:ext>
+            </a:extLst>
+          </p:cNvPr>
+          <p:cNvSpPr txBox="1"/>
+          <p:nvPr/>
+        </p:nvSpPr>
+        <p:spPr>
+          <a:xfrm>
+            <a:off x="184434" y="108743"/>
+            <a:ext cx="5229317" cy="523220"/>
+          </a:xfrm>
+          <a:prstGeom prst="rect">
+            <a:avLst/>
+          </a:prstGeom>
+          <a:noFill/>
+        </p:spPr>
+        <p:txBody>
+          <a:bodyPr wrap="none" rtlCol="0">
+            <a:spAutoFit/>
+          </a:bodyPr>
+          <a:lstStyle/>
+          <a:p>
+            <a:r>
+              <a:rPr lang="zh-CN" altLang="zh-CN" sz="2800" b="1" dirty="0"/>
+              <a:t>LoRA 微调 Steam 游戏助手模型</a:t>
+            </a:r>
+          </a:p>
+        </p:txBody>
+      </p:sp>
+      <p:grpSp>
+        <p:nvGrpSpPr>
+          <p:cNvPr id="7" name="组合 6">
+            <a:extLst>
+              <a:ext uri="{FF2B5EF4-FFF2-40B4-BE49-F238E27FC236}">
+                <a16:creationId xmlns:a16="http://schemas.microsoft.com/office/drawing/2014/main" id="{EFB9DB3D-2689-0390-53FD-FF4C06C242B0}"/>
+              </a:ext>
+            </a:extLst>
+          </p:cNvPr>
+          <p:cNvGrpSpPr/>
+          <p:nvPr/>
+        </p:nvGrpSpPr>
+        <p:grpSpPr>
+          <a:xfrm>
+            <a:off x="7137990" y="2107339"/>
+            <a:ext cx="4763386" cy="4058093"/>
+            <a:chOff x="6204991" y="1813140"/>
+            <a:chExt cx="5375588" cy="4807194"/>
+          </a:xfrm>
+        </p:grpSpPr>
+        <p:pic>
+          <p:nvPicPr>
+            <p:cNvPr id="5" name="图片 4">
+              <a:extLst>
+                <a:ext uri="{FF2B5EF4-FFF2-40B4-BE49-F238E27FC236}">
+                  <a16:creationId xmlns:a16="http://schemas.microsoft.com/office/drawing/2014/main" id="{A9429EF3-D9F7-8E74-1425-832C20308A91}"/>
+                </a:ext>
+              </a:extLst>
+            </p:cNvPr>
+            <p:cNvPicPr>
+              <a:picLocks noChangeAspect="1"/>
+            </p:cNvPicPr>
+            <p:nvPr/>
+          </p:nvPicPr>
+          <p:blipFill>
+            <a:blip r:embed="rId3"/>
+            <a:stretch>
+              <a:fillRect/>
+            </a:stretch>
+          </p:blipFill>
+          <p:spPr>
+            <a:xfrm>
+              <a:off x="6204992" y="4979510"/>
+              <a:ext cx="5375587" cy="1640824"/>
+            </a:xfrm>
+            <a:prstGeom prst="rect">
+              <a:avLst/>
+            </a:prstGeom>
+          </p:spPr>
+        </p:pic>
+        <p:pic>
+          <p:nvPicPr>
+            <p:cNvPr id="4" name="图片 3">
+              <a:extLst>
+                <a:ext uri="{FF2B5EF4-FFF2-40B4-BE49-F238E27FC236}">
+                  <a16:creationId xmlns:a16="http://schemas.microsoft.com/office/drawing/2014/main" id="{ADF23153-5FDF-FFB9-131E-309A446571A9}"/>
+                </a:ext>
+              </a:extLst>
+            </p:cNvPr>
+            <p:cNvPicPr>
+              <a:picLocks noChangeAspect="1"/>
+            </p:cNvPicPr>
+            <p:nvPr/>
+          </p:nvPicPr>
+          <p:blipFill>
+            <a:blip r:embed="rId4"/>
+            <a:srcRect b="47844"/>
+            <a:stretch>
+              <a:fillRect/>
+            </a:stretch>
+          </p:blipFill>
+          <p:spPr>
+            <a:xfrm>
+              <a:off x="6204991" y="1813140"/>
+              <a:ext cx="5375587" cy="1259526"/>
+            </a:xfrm>
+            <a:prstGeom prst="rect">
+              <a:avLst/>
+            </a:prstGeom>
+          </p:spPr>
+        </p:pic>
+        <p:pic>
+          <p:nvPicPr>
+            <p:cNvPr id="6" name="图片 5">
+              <a:extLst>
+                <a:ext uri="{FF2B5EF4-FFF2-40B4-BE49-F238E27FC236}">
+                  <a16:creationId xmlns:a16="http://schemas.microsoft.com/office/drawing/2014/main" id="{5C4D9FB3-B8D7-367B-67C0-7875505E6789}"/>
+                </a:ext>
+              </a:extLst>
+            </p:cNvPr>
+            <p:cNvPicPr>
+              <a:picLocks noChangeAspect="1"/>
+            </p:cNvPicPr>
+            <p:nvPr/>
+          </p:nvPicPr>
+          <p:blipFill>
+            <a:blip r:embed="rId5"/>
+            <a:stretch>
+              <a:fillRect/>
+            </a:stretch>
+          </p:blipFill>
+          <p:spPr>
+            <a:xfrm>
+              <a:off x="6204992" y="2976931"/>
+              <a:ext cx="5375587" cy="2006381"/>
+            </a:xfrm>
+            <a:prstGeom prst="rect">
+              <a:avLst/>
+            </a:prstGeom>
+          </p:spPr>
+        </p:pic>
+      </p:grpSp>
+      <p:sp>
+        <p:nvSpPr>
+          <p:cNvPr id="10" name="文本框 9">
+            <a:extLst>
+              <a:ext uri="{FF2B5EF4-FFF2-40B4-BE49-F238E27FC236}">
+                <a16:creationId xmlns:a16="http://schemas.microsoft.com/office/drawing/2014/main" id="{3F07CF73-E7FB-A801-DB06-D3714C253E84}"/>
+              </a:ext>
+            </a:extLst>
+          </p:cNvPr>
+          <p:cNvSpPr txBox="1"/>
+          <p:nvPr/>
+        </p:nvSpPr>
+        <p:spPr>
+          <a:xfrm>
+            <a:off x="184434" y="716221"/>
+            <a:ext cx="7059882" cy="646331"/>
+          </a:xfrm>
+          <a:prstGeom prst="rect">
+            <a:avLst/>
+          </a:prstGeom>
+          <a:noFill/>
+        </p:spPr>
+        <p:txBody>
+          <a:bodyPr wrap="square">
+            <a:spAutoFit/>
+          </a:bodyPr>
+          <a:lstStyle/>
+          <a:p>
+            <a:r>
+              <a:rPr lang="zh-CN" altLang="zh-CN" b="0" i="0" dirty="0">
+                <a:solidFill>
+                  <a:srgbClr val="333333"/>
+                </a:solidFill>
+                <a:effectLst/>
+                <a:latin typeface="Helvetica Neue"/>
+              </a:rPr>
+              <a:t>基于 Qwen2.5-7B 基座模型，利用 QLoRA 技术微调出兼具 </a:t>
+            </a:r>
+            <a:endParaRPr lang="en-US" altLang="zh-CN" b="0" i="0" dirty="0">
+              <a:solidFill>
+                <a:srgbClr val="333333"/>
+              </a:solidFill>
+              <a:effectLst/>
+              <a:latin typeface="Helvetica Neue"/>
+            </a:endParaRPr>
+          </a:p>
+          <a:p>
+            <a:r>
+              <a:rPr lang="zh-CN" altLang="zh-CN" b="1" i="0" dirty="0">
+                <a:solidFill>
+                  <a:srgbClr val="000000"/>
+                </a:solidFill>
+                <a:effectLst/>
+                <a:latin typeface="Helvetica Neue"/>
+              </a:rPr>
+              <a:t>游戏精灵语气风格</a:t>
+            </a:r>
+            <a:r>
+              <a:rPr lang="zh-CN" altLang="zh-CN" b="0" i="0" dirty="0">
+                <a:solidFill>
+                  <a:srgbClr val="333333"/>
+                </a:solidFill>
+                <a:effectLst/>
+                <a:latin typeface="Helvetica Neue"/>
+              </a:rPr>
+              <a:t> 和 </a:t>
+            </a:r>
+            <a:r>
+              <a:rPr lang="zh-CN" altLang="zh-CN" b="1" i="0" dirty="0">
+                <a:solidFill>
+                  <a:srgbClr val="000000"/>
+                </a:solidFill>
+                <a:effectLst/>
+                <a:latin typeface="Helvetica Neue"/>
+              </a:rPr>
+              <a:t>Steam MCP 工具调用能力</a:t>
+            </a:r>
+            <a:r>
+              <a:rPr lang="zh-CN" altLang="zh-CN" b="0" i="0" dirty="0">
+                <a:solidFill>
+                  <a:srgbClr val="333333"/>
+                </a:solidFill>
+                <a:effectLst/>
+                <a:latin typeface="Helvetica Neue"/>
+              </a:rPr>
+              <a:t> 的个性化 AI 助手。</a:t>
+            </a:r>
+            <a:endParaRPr lang="zh-CN" altLang="en-US" dirty="0"/>
+          </a:p>
+        </p:txBody>
+      </p:sp>
+      <p:grpSp>
+        <p:nvGrpSpPr>
+          <p:cNvPr id="16" name="组合 15">
+            <a:extLst>
+              <a:ext uri="{FF2B5EF4-FFF2-40B4-BE49-F238E27FC236}">
+                <a16:creationId xmlns:a16="http://schemas.microsoft.com/office/drawing/2014/main" id="{C90C9DF5-3DDD-3B7D-EA42-5540F1F73C65}"/>
+              </a:ext>
+            </a:extLst>
+          </p:cNvPr>
+          <p:cNvGrpSpPr/>
+          <p:nvPr/>
+        </p:nvGrpSpPr>
+        <p:grpSpPr>
+          <a:xfrm>
+            <a:off x="469959" y="1959192"/>
+            <a:ext cx="5120640" cy="4206240"/>
+            <a:chOff x="583373" y="1914274"/>
+            <a:chExt cx="5120640" cy="4206240"/>
+          </a:xfrm>
+        </p:grpSpPr>
+        <p:sp>
+          <p:nvSpPr>
+            <p:cNvPr id="12" name="Shape 5"/>
+            <p:cNvSpPr/>
+            <p:nvPr/>
+          </p:nvSpPr>
+          <p:spPr>
+            <a:xfrm>
+              <a:off x="583373" y="1914274"/>
+              <a:ext cx="5120640" cy="4206240"/>
+            </a:xfrm>
+            <a:prstGeom prst="roundRect">
+              <a:avLst>
+                <a:gd name="adj" fmla="val 2174"/>
+              </a:avLst>
+            </a:prstGeom>
+            <a:solidFill>
+              <a:srgbClr val="F4F8FD"/>
+            </a:solidFill>
+            <a:effectLst>
+              <a:outerShdw blurRad="114300" dist="38100" dir="5400000" algn="bl" rotWithShape="0">
+                <a:srgbClr val="000000">
+                  <a:alpha val="16000"/>
+                </a:srgbClr>
+              </a:outerShdw>
+            </a:effectLst>
+          </p:spPr>
+        </p:sp>
+        <p:sp>
+          <p:nvSpPr>
+            <p:cNvPr id="13" name="Text 6"/>
+            <p:cNvSpPr/>
+            <p:nvPr/>
+          </p:nvSpPr>
+          <p:spPr>
+            <a:xfrm>
+              <a:off x="914400" y="2011680"/>
+              <a:ext cx="4572000" cy="365760"/>
+            </a:xfrm>
+            <a:prstGeom prst="rect">
+              <a:avLst/>
+            </a:prstGeom>
+            <a:noFill/>
+          </p:spPr>
+          <p:txBody>
+            <a:bodyPr wrap="square" lIns="0" tIns="0" rIns="0" bIns="0" rtlCol="0" anchor="ctr"/>
+            <a:lstStyle/>
+            <a:p>
+              <a:pPr marL="0" indent="0">
+                <a:buNone/>
+              </a:pPr>
+              <a:r>
+                <a:rPr lang="en-US" sz="1500" b="1" dirty="0">
+                  <a:solidFill>
+                    <a:srgbClr val="0B1F3A"/>
+                  </a:solidFill>
+                  <a:latin typeface="Arial" panose="020B0604020202020204" pitchFamily="34" charset="0"/>
+                  <a:ea typeface="Arial" panose="020B0604020202020204" pitchFamily="34" charset="-122"/>
+                  <a:cs typeface="Arial" panose="020B0604020202020204" pitchFamily="34" charset="-120"/>
+                </a:rPr>
+                <a:t>训练 Loss 曲线</a:t>
+              </a:r>
+              <a:endParaRPr lang="en-US" sz="1500" dirty="0"/>
+            </a:p>
+          </p:txBody>
+        </p:sp>
+        <p:pic>
+          <p:nvPicPr>
+            <p:cNvPr id="14" name="Image 0"/>
+            <p:cNvPicPr>
+              <a:picLocks noChangeAspect="1"/>
+            </p:cNvPicPr>
+            <p:nvPr/>
+          </p:nvPicPr>
+          <p:blipFill>
+            <a:blip r:embed="rId6">
+              <a:extLst>
+                <a:ext uri="{28A0092B-C50C-407E-A947-70E740481C1C}">
+                  <a14:useLocalDpi xmlns:a14="http://schemas.microsoft.com/office/drawing/2010/main" val="0"/>
+                </a:ext>
+              </a:extLst>
+            </a:blip>
+            <a:srcRect/>
+            <a:stretch/>
+          </p:blipFill>
+          <p:spPr>
+            <a:xfrm>
+              <a:off x="857693" y="2639070"/>
+              <a:ext cx="4572000" cy="2722859"/>
+            </a:xfrm>
+            <a:prstGeom prst="rect">
+              <a:avLst/>
+            </a:prstGeom>
+          </p:spPr>
+        </p:pic>
+        <p:sp>
+          <p:nvSpPr>
+            <p:cNvPr id="15" name="Text 7"/>
+            <p:cNvSpPr/>
+            <p:nvPr/>
+          </p:nvSpPr>
+          <p:spPr>
+            <a:xfrm>
+              <a:off x="914400" y="5623560"/>
+              <a:ext cx="4572000" cy="320040"/>
+            </a:xfrm>
+            <a:prstGeom prst="rect">
+              <a:avLst/>
+            </a:prstGeom>
+            <a:noFill/>
+          </p:spPr>
+          <p:txBody>
+            <a:bodyPr wrap="square" lIns="0" tIns="0" rIns="0" bIns="0" rtlCol="0" anchor="ctr"/>
+            <a:lstStyle/>
+            <a:p>
+              <a:pPr marL="0" indent="0">
+                <a:buNone/>
+              </a:pPr>
+              <a:r>
+                <a:rPr lang="en-US" sz="1100" i="1" dirty="0">
+                  <a:solidFill>
+                    <a:srgbClr val="5B6675"/>
+                  </a:solidFill>
+                  <a:latin typeface="Arial" panose="020B0604020202020204" pitchFamily="34" charset="0"/>
+                  <a:ea typeface="Arial" panose="020B0604020202020204" pitchFamily="34" charset="-122"/>
+                  <a:cs typeface="Arial" panose="020B0604020202020204" pitchFamily="34" charset="-120"/>
+                </a:rPr>
+                <a:t>Loss 由 ~3.6 </a:t>
+              </a:r>
+              <a:r>
+                <a:rPr lang="en-US" sz="1100" i="1" dirty="0" err="1">
+                  <a:solidFill>
+                    <a:srgbClr val="5B6675"/>
+                  </a:solidFill>
+                  <a:latin typeface="Arial" panose="020B0604020202020204" pitchFamily="34" charset="0"/>
+                  <a:ea typeface="Arial" panose="020B0604020202020204" pitchFamily="34" charset="-122"/>
+                  <a:cs typeface="Arial" panose="020B0604020202020204" pitchFamily="34" charset="-120"/>
+                </a:rPr>
+                <a:t>稳定收敛至</a:t>
+              </a:r>
+              <a:r>
+                <a:rPr lang="en-US" sz="1100" i="1" dirty="0">
+                  <a:solidFill>
+                    <a:srgbClr val="5B6675"/>
+                  </a:solidFill>
+                  <a:latin typeface="Arial" panose="020B0604020202020204" pitchFamily="34" charset="0"/>
+                  <a:ea typeface="Arial" panose="020B0604020202020204" pitchFamily="34" charset="-122"/>
+                  <a:cs typeface="Arial" panose="020B0604020202020204" pitchFamily="34" charset="-120"/>
+                </a:rPr>
+                <a:t> ~1.94，训练正常</a:t>
+              </a:r>
+              <a:endParaRPr lang="en-US" sz="1100" dirty="0"/>
+            </a:p>
+          </p:txBody>
+        </p:sp>
+      </p:grpSp>
+      <p:sp>
+        <p:nvSpPr>
+          <p:cNvPr id="17" name="Text 8">
+            <a:extLst>
+              <a:ext uri="{FF2B5EF4-FFF2-40B4-BE49-F238E27FC236}">
+                <a16:creationId xmlns:a16="http://schemas.microsoft.com/office/drawing/2014/main" id="{DC572E22-A166-C09C-C4D2-3623FC168CB9}"/>
+              </a:ext>
+            </a:extLst>
+          </p:cNvPr>
+          <p:cNvSpPr/>
+          <p:nvPr/>
+        </p:nvSpPr>
+        <p:spPr>
+          <a:xfrm>
+            <a:off x="5704013" y="1959192"/>
+            <a:ext cx="1973580" cy="365760"/>
+          </a:xfrm>
+          <a:prstGeom prst="rect">
+            <a:avLst/>
+          </a:prstGeom>
+          <a:noFill/>
+        </p:spPr>
+        <p:txBody>
+          <a:bodyPr wrap="square" lIns="0" tIns="0" rIns="0" bIns="0" rtlCol="0" anchor="ctr"/>
+          <a:lstStyle/>
+          <a:p>
+            <a:pPr marL="0" indent="0">
+              <a:buNone/>
+            </a:pPr>
+            <a:r>
+              <a:rPr lang="en-US" sz="1500" b="1" dirty="0">
+                <a:solidFill>
+                  <a:srgbClr val="0B1F3A"/>
+                </a:solidFill>
+                <a:latin typeface="Arial" panose="020B0604020202020204" pitchFamily="34" charset="0"/>
+                <a:ea typeface="Arial" panose="020B0604020202020204" pitchFamily="34" charset="-122"/>
+                <a:cs typeface="Arial" panose="020B0604020202020204" pitchFamily="34" charset="-120"/>
+              </a:rPr>
+              <a:t>微调后问答效果</a:t>
+            </a:r>
+            <a:endParaRPr lang="en-US" sz="1500" dirty="0"/>
+          </a:p>
+        </p:txBody>
+      </p:sp>
+    </p:spTree>
+    <p:extLst>
+      <p:ext uri="{BB962C8B-B14F-4D97-AF65-F5344CB8AC3E}">
+        <p14:creationId xmlns:p14="http://schemas.microsoft.com/office/powerpoint/2010/main" val="2593844675"/>
+      </p:ext>
+    </p:extLst>
+  </p:cSld>
+  <p:clrMapOvr>
+    <a:masterClrMapping/>
+  </p:clrMapOvr>
+</p:sld>
+</file>
+
+<file path=ppt/slides/slide6.xml><?xml version="1.0" encoding="utf-8"?>
+<p:sld xmlns:a="http://schemas.openxmlformats.org/drawingml/2006/main" xmlns:r="http://schemas.openxmlformats.org/officeDocument/2006/relationships" xmlns:p="http://schemas.openxmlformats.org/presentationml/2006/main">
+  <p:cSld>
+    <p:spTree>
+      <p:nvGrpSpPr>
         <p:cNvPr id="1" name=""/>
         <p:cNvGrpSpPr/>
         <p:nvPr/>
@@ -10758,7 +11337,7 @@
 </p:sld>
 </file>
 
-<file path=ppt/slides/slide6.xml><?xml version="1.0" encoding="utf-8"?>
+<file path=ppt/slides/slide7.xml><?xml version="1.0" encoding="utf-8"?>
 <p:sld xmlns:a="http://schemas.openxmlformats.org/drawingml/2006/main" xmlns:r="http://schemas.openxmlformats.org/officeDocument/2006/relationships" xmlns:p="http://schemas.openxmlformats.org/presentationml/2006/main">
   <p:cSld>
     <p:spTree>

--- a/ppt.pptx
+++ b/ppt.pptx
@@ -10590,6 +10590,803 @@
   <p:clrMapOvr>
     <a:masterClrMapping/>
   </p:clrMapOvr>
+  <p:timing>
+    <p:tnLst>
+      <p:par>
+        <p:cTn id="1" dur="indefinite" restart="never" nodeType="tmRoot">
+          <p:childTnLst>
+            <p:seq concurrent="1" nextAc="seek">
+              <p:cTn id="2" dur="indefinite" nodeType="mainSeq">
+                <p:childTnLst>
+                  <p:par>
+                    <p:cTn id="3" fill="hold">
+                      <p:stCondLst>
+                        <p:cond delay="indefinite"/>
+                      </p:stCondLst>
+                      <p:childTnLst>
+                        <p:par>
+                          <p:cTn id="4" fill="hold">
+                            <p:stCondLst>
+                              <p:cond delay="0"/>
+                            </p:stCondLst>
+                            <p:childTnLst>
+                              <p:par>
+                                <p:cTn id="5" presetID="10" presetClass="entr" presetSubtype="0" fill="hold" grpId="0" nodeType="clickEffect">
+                                  <p:stCondLst>
+                                    <p:cond delay="0"/>
+                                  </p:stCondLst>
+                                  <p:childTnLst>
+                                    <p:set>
+                                      <p:cBhvr>
+                                        <p:cTn id="6" dur="1" fill="hold">
+                                          <p:stCondLst>
+                                            <p:cond delay="0"/>
+                                          </p:stCondLst>
+                                        </p:cTn>
+                                        <p:tgtEl>
+                                          <p:spTgt spid="30"/>
+                                        </p:tgtEl>
+                                        <p:attrNameLst>
+                                          <p:attrName>style.visibility</p:attrName>
+                                        </p:attrNameLst>
+                                      </p:cBhvr>
+                                      <p:to>
+                                        <p:strVal val="visible"/>
+                                      </p:to>
+                                    </p:set>
+                                    <p:animEffect transition="in" filter="fade">
+                                      <p:cBhvr>
+                                        <p:cTn id="7" dur="500"/>
+                                        <p:tgtEl>
+                                          <p:spTgt spid="30"/>
+                                        </p:tgtEl>
+                                      </p:cBhvr>
+                                    </p:animEffect>
+                                  </p:childTnLst>
+                                </p:cTn>
+                              </p:par>
+                              <p:par>
+                                <p:cTn id="8" presetID="10" presetClass="entr" presetSubtype="0" fill="hold" grpId="0" nodeType="withEffect">
+                                  <p:stCondLst>
+                                    <p:cond delay="0"/>
+                                  </p:stCondLst>
+                                  <p:childTnLst>
+                                    <p:set>
+                                      <p:cBhvr>
+                                        <p:cTn id="9" dur="1" fill="hold">
+                                          <p:stCondLst>
+                                            <p:cond delay="0"/>
+                                          </p:stCondLst>
+                                        </p:cTn>
+                                        <p:tgtEl>
+                                          <p:spTgt spid="27"/>
+                                        </p:tgtEl>
+                                        <p:attrNameLst>
+                                          <p:attrName>style.visibility</p:attrName>
+                                        </p:attrNameLst>
+                                      </p:cBhvr>
+                                      <p:to>
+                                        <p:strVal val="visible"/>
+                                      </p:to>
+                                    </p:set>
+                                    <p:animEffect transition="in" filter="fade">
+                                      <p:cBhvr>
+                                        <p:cTn id="10" dur="500"/>
+                                        <p:tgtEl>
+                                          <p:spTgt spid="27"/>
+                                        </p:tgtEl>
+                                      </p:cBhvr>
+                                    </p:animEffect>
+                                  </p:childTnLst>
+                                </p:cTn>
+                              </p:par>
+                              <p:par>
+                                <p:cTn id="11" presetID="10" presetClass="entr" presetSubtype="0" fill="hold" grpId="0" nodeType="withEffect">
+                                  <p:stCondLst>
+                                    <p:cond delay="0"/>
+                                  </p:stCondLst>
+                                  <p:childTnLst>
+                                    <p:set>
+                                      <p:cBhvr>
+                                        <p:cTn id="12" dur="1" fill="hold">
+                                          <p:stCondLst>
+                                            <p:cond delay="0"/>
+                                          </p:stCondLst>
+                                        </p:cTn>
+                                        <p:tgtEl>
+                                          <p:spTgt spid="39"/>
+                                        </p:tgtEl>
+                                        <p:attrNameLst>
+                                          <p:attrName>style.visibility</p:attrName>
+                                        </p:attrNameLst>
+                                      </p:cBhvr>
+                                      <p:to>
+                                        <p:strVal val="visible"/>
+                                      </p:to>
+                                    </p:set>
+                                    <p:animEffect transition="in" filter="fade">
+                                      <p:cBhvr>
+                                        <p:cTn id="13" dur="500"/>
+                                        <p:tgtEl>
+                                          <p:spTgt spid="39"/>
+                                        </p:tgtEl>
+                                      </p:cBhvr>
+                                    </p:animEffect>
+                                  </p:childTnLst>
+                                </p:cTn>
+                              </p:par>
+                              <p:par>
+                                <p:cTn id="14" presetID="10" presetClass="entr" presetSubtype="0" fill="hold" grpId="0" nodeType="withEffect">
+                                  <p:stCondLst>
+                                    <p:cond delay="0"/>
+                                  </p:stCondLst>
+                                  <p:childTnLst>
+                                    <p:set>
+                                      <p:cBhvr>
+                                        <p:cTn id="15" dur="1" fill="hold">
+                                          <p:stCondLst>
+                                            <p:cond delay="0"/>
+                                          </p:stCondLst>
+                                        </p:cTn>
+                                        <p:tgtEl>
+                                          <p:spTgt spid="40"/>
+                                        </p:tgtEl>
+                                        <p:attrNameLst>
+                                          <p:attrName>style.visibility</p:attrName>
+                                        </p:attrNameLst>
+                                      </p:cBhvr>
+                                      <p:to>
+                                        <p:strVal val="visible"/>
+                                      </p:to>
+                                    </p:set>
+                                    <p:animEffect transition="in" filter="fade">
+                                      <p:cBhvr>
+                                        <p:cTn id="16" dur="500"/>
+                                        <p:tgtEl>
+                                          <p:spTgt spid="40"/>
+                                        </p:tgtEl>
+                                      </p:cBhvr>
+                                    </p:animEffect>
+                                  </p:childTnLst>
+                                </p:cTn>
+                              </p:par>
+                              <p:par>
+                                <p:cTn id="17" presetID="10" presetClass="entr" presetSubtype="0" fill="hold" grpId="0" nodeType="withEffect">
+                                  <p:stCondLst>
+                                    <p:cond delay="0"/>
+                                  </p:stCondLst>
+                                  <p:childTnLst>
+                                    <p:set>
+                                      <p:cBhvr>
+                                        <p:cTn id="18" dur="1" fill="hold">
+                                          <p:stCondLst>
+                                            <p:cond delay="0"/>
+                                          </p:stCondLst>
+                                        </p:cTn>
+                                        <p:tgtEl>
+                                          <p:spTgt spid="42"/>
+                                        </p:tgtEl>
+                                        <p:attrNameLst>
+                                          <p:attrName>style.visibility</p:attrName>
+                                        </p:attrNameLst>
+                                      </p:cBhvr>
+                                      <p:to>
+                                        <p:strVal val="visible"/>
+                                      </p:to>
+                                    </p:set>
+                                    <p:animEffect transition="in" filter="fade">
+                                      <p:cBhvr>
+                                        <p:cTn id="19" dur="500"/>
+                                        <p:tgtEl>
+                                          <p:spTgt spid="42"/>
+                                        </p:tgtEl>
+                                      </p:cBhvr>
+                                    </p:animEffect>
+                                  </p:childTnLst>
+                                </p:cTn>
+                              </p:par>
+                              <p:par>
+                                <p:cTn id="20" presetID="10" presetClass="entr" presetSubtype="0" fill="hold" grpId="0" nodeType="withEffect">
+                                  <p:stCondLst>
+                                    <p:cond delay="0"/>
+                                  </p:stCondLst>
+                                  <p:childTnLst>
+                                    <p:set>
+                                      <p:cBhvr>
+                                        <p:cTn id="21" dur="1" fill="hold">
+                                          <p:stCondLst>
+                                            <p:cond delay="0"/>
+                                          </p:stCondLst>
+                                        </p:cTn>
+                                        <p:tgtEl>
+                                          <p:spTgt spid="43"/>
+                                        </p:tgtEl>
+                                        <p:attrNameLst>
+                                          <p:attrName>style.visibility</p:attrName>
+                                        </p:attrNameLst>
+                                      </p:cBhvr>
+                                      <p:to>
+                                        <p:strVal val="visible"/>
+                                      </p:to>
+                                    </p:set>
+                                    <p:animEffect transition="in" filter="fade">
+                                      <p:cBhvr>
+                                        <p:cTn id="22" dur="500"/>
+                                        <p:tgtEl>
+                                          <p:spTgt spid="43"/>
+                                        </p:tgtEl>
+                                      </p:cBhvr>
+                                    </p:animEffect>
+                                  </p:childTnLst>
+                                </p:cTn>
+                              </p:par>
+                              <p:par>
+                                <p:cTn id="23" presetID="10" presetClass="entr" presetSubtype="0" fill="hold" grpId="0" nodeType="withEffect">
+                                  <p:stCondLst>
+                                    <p:cond delay="0"/>
+                                  </p:stCondLst>
+                                  <p:childTnLst>
+                                    <p:set>
+                                      <p:cBhvr>
+                                        <p:cTn id="24" dur="1" fill="hold">
+                                          <p:stCondLst>
+                                            <p:cond delay="0"/>
+                                          </p:stCondLst>
+                                        </p:cTn>
+                                        <p:tgtEl>
+                                          <p:spTgt spid="45"/>
+                                        </p:tgtEl>
+                                        <p:attrNameLst>
+                                          <p:attrName>style.visibility</p:attrName>
+                                        </p:attrNameLst>
+                                      </p:cBhvr>
+                                      <p:to>
+                                        <p:strVal val="visible"/>
+                                      </p:to>
+                                    </p:set>
+                                    <p:animEffect transition="in" filter="fade">
+                                      <p:cBhvr>
+                                        <p:cTn id="25" dur="500"/>
+                                        <p:tgtEl>
+                                          <p:spTgt spid="45"/>
+                                        </p:tgtEl>
+                                      </p:cBhvr>
+                                    </p:animEffect>
+                                  </p:childTnLst>
+                                </p:cTn>
+                              </p:par>
+                              <p:par>
+                                <p:cTn id="26" presetID="10" presetClass="entr" presetSubtype="0" fill="hold" grpId="0" nodeType="withEffect">
+                                  <p:stCondLst>
+                                    <p:cond delay="0"/>
+                                  </p:stCondLst>
+                                  <p:childTnLst>
+                                    <p:set>
+                                      <p:cBhvr>
+                                        <p:cTn id="27" dur="1" fill="hold">
+                                          <p:stCondLst>
+                                            <p:cond delay="0"/>
+                                          </p:stCondLst>
+                                        </p:cTn>
+                                        <p:tgtEl>
+                                          <p:spTgt spid="46"/>
+                                        </p:tgtEl>
+                                        <p:attrNameLst>
+                                          <p:attrName>style.visibility</p:attrName>
+                                        </p:attrNameLst>
+                                      </p:cBhvr>
+                                      <p:to>
+                                        <p:strVal val="visible"/>
+                                      </p:to>
+                                    </p:set>
+                                    <p:animEffect transition="in" filter="fade">
+                                      <p:cBhvr>
+                                        <p:cTn id="28" dur="500"/>
+                                        <p:tgtEl>
+                                          <p:spTgt spid="46"/>
+                                        </p:tgtEl>
+                                      </p:cBhvr>
+                                    </p:animEffect>
+                                  </p:childTnLst>
+                                </p:cTn>
+                              </p:par>
+                              <p:par>
+                                <p:cTn id="29" presetID="10" presetClass="entr" presetSubtype="0" fill="hold" grpId="0" nodeType="withEffect">
+                                  <p:stCondLst>
+                                    <p:cond delay="0"/>
+                                  </p:stCondLst>
+                                  <p:childTnLst>
+                                    <p:set>
+                                      <p:cBhvr>
+                                        <p:cTn id="30" dur="1" fill="hold">
+                                          <p:stCondLst>
+                                            <p:cond delay="0"/>
+                                          </p:stCondLst>
+                                        </p:cTn>
+                                        <p:tgtEl>
+                                          <p:spTgt spid="48"/>
+                                        </p:tgtEl>
+                                        <p:attrNameLst>
+                                          <p:attrName>style.visibility</p:attrName>
+                                        </p:attrNameLst>
+                                      </p:cBhvr>
+                                      <p:to>
+                                        <p:strVal val="visible"/>
+                                      </p:to>
+                                    </p:set>
+                                    <p:animEffect transition="in" filter="fade">
+                                      <p:cBhvr>
+                                        <p:cTn id="31" dur="500"/>
+                                        <p:tgtEl>
+                                          <p:spTgt spid="48"/>
+                                        </p:tgtEl>
+                                      </p:cBhvr>
+                                    </p:animEffect>
+                                  </p:childTnLst>
+                                </p:cTn>
+                              </p:par>
+                              <p:par>
+                                <p:cTn id="32" presetID="10" presetClass="entr" presetSubtype="0" fill="hold" grpId="0" nodeType="withEffect">
+                                  <p:stCondLst>
+                                    <p:cond delay="0"/>
+                                  </p:stCondLst>
+                                  <p:childTnLst>
+                                    <p:set>
+                                      <p:cBhvr>
+                                        <p:cTn id="33" dur="1" fill="hold">
+                                          <p:stCondLst>
+                                            <p:cond delay="0"/>
+                                          </p:stCondLst>
+                                        </p:cTn>
+                                        <p:tgtEl>
+                                          <p:spTgt spid="49"/>
+                                        </p:tgtEl>
+                                        <p:attrNameLst>
+                                          <p:attrName>style.visibility</p:attrName>
+                                        </p:attrNameLst>
+                                      </p:cBhvr>
+                                      <p:to>
+                                        <p:strVal val="visible"/>
+                                      </p:to>
+                                    </p:set>
+                                    <p:animEffect transition="in" filter="fade">
+                                      <p:cBhvr>
+                                        <p:cTn id="34" dur="500"/>
+                                        <p:tgtEl>
+                                          <p:spTgt spid="49"/>
+                                        </p:tgtEl>
+                                      </p:cBhvr>
+                                    </p:animEffect>
+                                  </p:childTnLst>
+                                </p:cTn>
+                              </p:par>
+                              <p:par>
+                                <p:cTn id="35" presetID="10" presetClass="entr" presetSubtype="0" fill="hold" grpId="0" nodeType="withEffect">
+                                  <p:stCondLst>
+                                    <p:cond delay="0"/>
+                                  </p:stCondLst>
+                                  <p:childTnLst>
+                                    <p:set>
+                                      <p:cBhvr>
+                                        <p:cTn id="36" dur="1" fill="hold">
+                                          <p:stCondLst>
+                                            <p:cond delay="0"/>
+                                          </p:stCondLst>
+                                        </p:cTn>
+                                        <p:tgtEl>
+                                          <p:spTgt spid="50"/>
+                                        </p:tgtEl>
+                                        <p:attrNameLst>
+                                          <p:attrName>style.visibility</p:attrName>
+                                        </p:attrNameLst>
+                                      </p:cBhvr>
+                                      <p:to>
+                                        <p:strVal val="visible"/>
+                                      </p:to>
+                                    </p:set>
+                                    <p:animEffect transition="in" filter="fade">
+                                      <p:cBhvr>
+                                        <p:cTn id="37" dur="500"/>
+                                        <p:tgtEl>
+                                          <p:spTgt spid="50"/>
+                                        </p:tgtEl>
+                                      </p:cBhvr>
+                                    </p:animEffect>
+                                  </p:childTnLst>
+                                </p:cTn>
+                              </p:par>
+                              <p:par>
+                                <p:cTn id="38" presetID="10" presetClass="entr" presetSubtype="0" fill="hold" grpId="0" nodeType="withEffect">
+                                  <p:stCondLst>
+                                    <p:cond delay="0"/>
+                                  </p:stCondLst>
+                                  <p:childTnLst>
+                                    <p:set>
+                                      <p:cBhvr>
+                                        <p:cTn id="39" dur="1" fill="hold">
+                                          <p:stCondLst>
+                                            <p:cond delay="0"/>
+                                          </p:stCondLst>
+                                        </p:cTn>
+                                        <p:tgtEl>
+                                          <p:spTgt spid="51"/>
+                                        </p:tgtEl>
+                                        <p:attrNameLst>
+                                          <p:attrName>style.visibility</p:attrName>
+                                        </p:attrNameLst>
+                                      </p:cBhvr>
+                                      <p:to>
+                                        <p:strVal val="visible"/>
+                                      </p:to>
+                                    </p:set>
+                                    <p:animEffect transition="in" filter="fade">
+                                      <p:cBhvr>
+                                        <p:cTn id="40" dur="500"/>
+                                        <p:tgtEl>
+                                          <p:spTgt spid="51"/>
+                                        </p:tgtEl>
+                                      </p:cBhvr>
+                                    </p:animEffect>
+                                  </p:childTnLst>
+                                </p:cTn>
+                              </p:par>
+                              <p:par>
+                                <p:cTn id="41" presetID="10" presetClass="entr" presetSubtype="0" fill="hold" nodeType="withEffect">
+                                  <p:stCondLst>
+                                    <p:cond delay="0"/>
+                                  </p:stCondLst>
+                                  <p:childTnLst>
+                                    <p:set>
+                                      <p:cBhvr>
+                                        <p:cTn id="42" dur="1" fill="hold">
+                                          <p:stCondLst>
+                                            <p:cond delay="0"/>
+                                          </p:stCondLst>
+                                        </p:cTn>
+                                        <p:tgtEl>
+                                          <p:spTgt spid="59"/>
+                                        </p:tgtEl>
+                                        <p:attrNameLst>
+                                          <p:attrName>style.visibility</p:attrName>
+                                        </p:attrNameLst>
+                                      </p:cBhvr>
+                                      <p:to>
+                                        <p:strVal val="visible"/>
+                                      </p:to>
+                                    </p:set>
+                                    <p:animEffect transition="in" filter="fade">
+                                      <p:cBhvr>
+                                        <p:cTn id="43" dur="500"/>
+                                        <p:tgtEl>
+                                          <p:spTgt spid="59"/>
+                                        </p:tgtEl>
+                                      </p:cBhvr>
+                                    </p:animEffect>
+                                  </p:childTnLst>
+                                </p:cTn>
+                              </p:par>
+                              <p:par>
+                                <p:cTn id="44" presetID="10" presetClass="entr" presetSubtype="0" fill="hold" nodeType="withEffect">
+                                  <p:stCondLst>
+                                    <p:cond delay="0"/>
+                                  </p:stCondLst>
+                                  <p:childTnLst>
+                                    <p:set>
+                                      <p:cBhvr>
+                                        <p:cTn id="45" dur="1" fill="hold">
+                                          <p:stCondLst>
+                                            <p:cond delay="0"/>
+                                          </p:stCondLst>
+                                        </p:cTn>
+                                        <p:tgtEl>
+                                          <p:spTgt spid="62"/>
+                                        </p:tgtEl>
+                                        <p:attrNameLst>
+                                          <p:attrName>style.visibility</p:attrName>
+                                        </p:attrNameLst>
+                                      </p:cBhvr>
+                                      <p:to>
+                                        <p:strVal val="visible"/>
+                                      </p:to>
+                                    </p:set>
+                                    <p:animEffect transition="in" filter="fade">
+                                      <p:cBhvr>
+                                        <p:cTn id="46" dur="500"/>
+                                        <p:tgtEl>
+                                          <p:spTgt spid="62"/>
+                                        </p:tgtEl>
+                                      </p:cBhvr>
+                                    </p:animEffect>
+                                  </p:childTnLst>
+                                </p:cTn>
+                              </p:par>
+                              <p:par>
+                                <p:cTn id="47" presetID="10" presetClass="entr" presetSubtype="0" fill="hold" nodeType="withEffect">
+                                  <p:stCondLst>
+                                    <p:cond delay="0"/>
+                                  </p:stCondLst>
+                                  <p:childTnLst>
+                                    <p:set>
+                                      <p:cBhvr>
+                                        <p:cTn id="48" dur="1" fill="hold">
+                                          <p:stCondLst>
+                                            <p:cond delay="0"/>
+                                          </p:stCondLst>
+                                        </p:cTn>
+                                        <p:tgtEl>
+                                          <p:spTgt spid="65"/>
+                                        </p:tgtEl>
+                                        <p:attrNameLst>
+                                          <p:attrName>style.visibility</p:attrName>
+                                        </p:attrNameLst>
+                                      </p:cBhvr>
+                                      <p:to>
+                                        <p:strVal val="visible"/>
+                                      </p:to>
+                                    </p:set>
+                                    <p:animEffect transition="in" filter="fade">
+                                      <p:cBhvr>
+                                        <p:cTn id="49" dur="500"/>
+                                        <p:tgtEl>
+                                          <p:spTgt spid="65"/>
+                                        </p:tgtEl>
+                                      </p:cBhvr>
+                                    </p:animEffect>
+                                  </p:childTnLst>
+                                </p:cTn>
+                              </p:par>
+                              <p:par>
+                                <p:cTn id="50" presetID="10" presetClass="entr" presetSubtype="0" fill="hold" nodeType="withEffect">
+                                  <p:stCondLst>
+                                    <p:cond delay="0"/>
+                                  </p:stCondLst>
+                                  <p:childTnLst>
+                                    <p:set>
+                                      <p:cBhvr>
+                                        <p:cTn id="51" dur="1" fill="hold">
+                                          <p:stCondLst>
+                                            <p:cond delay="0"/>
+                                          </p:stCondLst>
+                                        </p:cTn>
+                                        <p:tgtEl>
+                                          <p:spTgt spid="68"/>
+                                        </p:tgtEl>
+                                        <p:attrNameLst>
+                                          <p:attrName>style.visibility</p:attrName>
+                                        </p:attrNameLst>
+                                      </p:cBhvr>
+                                      <p:to>
+                                        <p:strVal val="visible"/>
+                                      </p:to>
+                                    </p:set>
+                                    <p:animEffect transition="in" filter="fade">
+                                      <p:cBhvr>
+                                        <p:cTn id="52" dur="500"/>
+                                        <p:tgtEl>
+                                          <p:spTgt spid="68"/>
+                                        </p:tgtEl>
+                                      </p:cBhvr>
+                                    </p:animEffect>
+                                  </p:childTnLst>
+                                </p:cTn>
+                              </p:par>
+                              <p:par>
+                                <p:cTn id="53" presetID="10" presetClass="entr" presetSubtype="0" fill="hold" nodeType="withEffect">
+                                  <p:stCondLst>
+                                    <p:cond delay="0"/>
+                                  </p:stCondLst>
+                                  <p:childTnLst>
+                                    <p:set>
+                                      <p:cBhvr>
+                                        <p:cTn id="54" dur="1" fill="hold">
+                                          <p:stCondLst>
+                                            <p:cond delay="0"/>
+                                          </p:stCondLst>
+                                        </p:cTn>
+                                        <p:tgtEl>
+                                          <p:spTgt spid="72"/>
+                                        </p:tgtEl>
+                                        <p:attrNameLst>
+                                          <p:attrName>style.visibility</p:attrName>
+                                        </p:attrNameLst>
+                                      </p:cBhvr>
+                                      <p:to>
+                                        <p:strVal val="visible"/>
+                                      </p:to>
+                                    </p:set>
+                                    <p:animEffect transition="in" filter="fade">
+                                      <p:cBhvr>
+                                        <p:cTn id="55" dur="500"/>
+                                        <p:tgtEl>
+                                          <p:spTgt spid="72"/>
+                                        </p:tgtEl>
+                                      </p:cBhvr>
+                                    </p:animEffect>
+                                  </p:childTnLst>
+                                </p:cTn>
+                              </p:par>
+                              <p:par>
+                                <p:cTn id="56" presetID="10" presetClass="entr" presetSubtype="0" fill="hold" nodeType="withEffect">
+                                  <p:stCondLst>
+                                    <p:cond delay="0"/>
+                                  </p:stCondLst>
+                                  <p:childTnLst>
+                                    <p:set>
+                                      <p:cBhvr>
+                                        <p:cTn id="57" dur="1" fill="hold">
+                                          <p:stCondLst>
+                                            <p:cond delay="0"/>
+                                          </p:stCondLst>
+                                        </p:cTn>
+                                        <p:tgtEl>
+                                          <p:spTgt spid="75"/>
+                                        </p:tgtEl>
+                                        <p:attrNameLst>
+                                          <p:attrName>style.visibility</p:attrName>
+                                        </p:attrNameLst>
+                                      </p:cBhvr>
+                                      <p:to>
+                                        <p:strVal val="visible"/>
+                                      </p:to>
+                                    </p:set>
+                                    <p:animEffect transition="in" filter="fade">
+                                      <p:cBhvr>
+                                        <p:cTn id="58" dur="500"/>
+                                        <p:tgtEl>
+                                          <p:spTgt spid="75"/>
+                                        </p:tgtEl>
+                                      </p:cBhvr>
+                                    </p:animEffect>
+                                  </p:childTnLst>
+                                </p:cTn>
+                              </p:par>
+                              <p:par>
+                                <p:cTn id="59" presetID="10" presetClass="entr" presetSubtype="0" fill="hold" nodeType="withEffect">
+                                  <p:stCondLst>
+                                    <p:cond delay="0"/>
+                                  </p:stCondLst>
+                                  <p:childTnLst>
+                                    <p:set>
+                                      <p:cBhvr>
+                                        <p:cTn id="60" dur="1" fill="hold">
+                                          <p:stCondLst>
+                                            <p:cond delay="0"/>
+                                          </p:stCondLst>
+                                        </p:cTn>
+                                        <p:tgtEl>
+                                          <p:spTgt spid="79"/>
+                                        </p:tgtEl>
+                                        <p:attrNameLst>
+                                          <p:attrName>style.visibility</p:attrName>
+                                        </p:attrNameLst>
+                                      </p:cBhvr>
+                                      <p:to>
+                                        <p:strVal val="visible"/>
+                                      </p:to>
+                                    </p:set>
+                                    <p:animEffect transition="in" filter="fade">
+                                      <p:cBhvr>
+                                        <p:cTn id="61" dur="500"/>
+                                        <p:tgtEl>
+                                          <p:spTgt spid="79"/>
+                                        </p:tgtEl>
+                                      </p:cBhvr>
+                                    </p:animEffect>
+                                  </p:childTnLst>
+                                </p:cTn>
+                              </p:par>
+                              <p:par>
+                                <p:cTn id="62" presetID="10" presetClass="entr" presetSubtype="0" fill="hold" nodeType="withEffect">
+                                  <p:stCondLst>
+                                    <p:cond delay="0"/>
+                                  </p:stCondLst>
+                                  <p:childTnLst>
+                                    <p:set>
+                                      <p:cBhvr>
+                                        <p:cTn id="63" dur="1" fill="hold">
+                                          <p:stCondLst>
+                                            <p:cond delay="0"/>
+                                          </p:stCondLst>
+                                        </p:cTn>
+                                        <p:tgtEl>
+                                          <p:spTgt spid="82"/>
+                                        </p:tgtEl>
+                                        <p:attrNameLst>
+                                          <p:attrName>style.visibility</p:attrName>
+                                        </p:attrNameLst>
+                                      </p:cBhvr>
+                                      <p:to>
+                                        <p:strVal val="visible"/>
+                                      </p:to>
+                                    </p:set>
+                                    <p:animEffect transition="in" filter="fade">
+                                      <p:cBhvr>
+                                        <p:cTn id="64" dur="500"/>
+                                        <p:tgtEl>
+                                          <p:spTgt spid="82"/>
+                                        </p:tgtEl>
+                                      </p:cBhvr>
+                                    </p:animEffect>
+                                  </p:childTnLst>
+                                </p:cTn>
+                              </p:par>
+                              <p:par>
+                                <p:cTn id="65" presetID="10" presetClass="entr" presetSubtype="0" fill="hold" nodeType="withEffect">
+                                  <p:stCondLst>
+                                    <p:cond delay="0"/>
+                                  </p:stCondLst>
+                                  <p:childTnLst>
+                                    <p:set>
+                                      <p:cBhvr>
+                                        <p:cTn id="66" dur="1" fill="hold">
+                                          <p:stCondLst>
+                                            <p:cond delay="0"/>
+                                          </p:stCondLst>
+                                        </p:cTn>
+                                        <p:tgtEl>
+                                          <p:spTgt spid="85"/>
+                                        </p:tgtEl>
+                                        <p:attrNameLst>
+                                          <p:attrName>style.visibility</p:attrName>
+                                        </p:attrNameLst>
+                                      </p:cBhvr>
+                                      <p:to>
+                                        <p:strVal val="visible"/>
+                                      </p:to>
+                                    </p:set>
+                                    <p:animEffect transition="in" filter="fade">
+                                      <p:cBhvr>
+                                        <p:cTn id="67" dur="500"/>
+                                        <p:tgtEl>
+                                          <p:spTgt spid="85"/>
+                                        </p:tgtEl>
+                                      </p:cBhvr>
+                                    </p:animEffect>
+                                  </p:childTnLst>
+                                </p:cTn>
+                              </p:par>
+                            </p:childTnLst>
+                          </p:cTn>
+                        </p:par>
+                      </p:childTnLst>
+                    </p:cTn>
+                  </p:par>
+                </p:childTnLst>
+              </p:cTn>
+              <p:prevCondLst>
+                <p:cond evt="onPrev" delay="0">
+                  <p:tgtEl>
+                    <p:sldTgt/>
+                  </p:tgtEl>
+                </p:cond>
+              </p:prevCondLst>
+              <p:nextCondLst>
+                <p:cond evt="onNext" delay="0">
+                  <p:tgtEl>
+                    <p:sldTgt/>
+                  </p:tgtEl>
+                </p:cond>
+              </p:nextCondLst>
+            </p:seq>
+          </p:childTnLst>
+        </p:cTn>
+      </p:par>
+    </p:tnLst>
+    <p:bldLst>
+      <p:bldP spid="30" grpId="0"/>
+      <p:bldP spid="27" grpId="0" animBg="1"/>
+      <p:bldP spid="39" grpId="0" animBg="1"/>
+      <p:bldP spid="40" grpId="0" animBg="1"/>
+      <p:bldP spid="42" grpId="0" animBg="1"/>
+      <p:bldP spid="43" grpId="0" animBg="1"/>
+      <p:bldP spid="45" grpId="0" animBg="1"/>
+      <p:bldP spid="46" grpId="0" animBg="1"/>
+      <p:bldP spid="48" grpId="0" animBg="1"/>
+      <p:bldP spid="49" grpId="0" animBg="1"/>
+      <p:bldP spid="50" grpId="0" animBg="1"/>
+      <p:bldP spid="51" grpId="0" animBg="1"/>
+    </p:bldLst>
+  </p:timing>
 </p:sld>
 </file>
 

--- a/ppt.pptx
+++ b/ppt.pptx
@@ -5,16 +5,18 @@
     <p:sldMasterId id="2147483648" r:id="rId1"/>
   </p:sldMasterIdLst>
   <p:notesMasterIdLst>
-    <p:notesMasterId r:id="rId9"/>
+    <p:notesMasterId r:id="rId11"/>
   </p:notesMasterIdLst>
   <p:sldIdLst>
     <p:sldId id="261" r:id="rId2"/>
     <p:sldId id="258" r:id="rId3"/>
     <p:sldId id="259" r:id="rId4"/>
     <p:sldId id="260" r:id="rId5"/>
-    <p:sldId id="264" r:id="rId6"/>
-    <p:sldId id="263" r:id="rId7"/>
-    <p:sldId id="262" r:id="rId8"/>
+    <p:sldId id="266" r:id="rId6"/>
+    <p:sldId id="264" r:id="rId7"/>
+    <p:sldId id="265" r:id="rId8"/>
+    <p:sldId id="263" r:id="rId9"/>
+    <p:sldId id="262" r:id="rId10"/>
   </p:sldIdLst>
   <p:sldSz cx="12192000" cy="6858000"/>
   <p:notesSz cx="6858000" cy="9144000"/>
@@ -703,7 +705,7 @@
           <a:p>
             <a:fld id="{29DB8E75-8AA8-43C4-8332-1EA0F488397E}" type="slidenum">
               <a:rPr lang="zh-CN" altLang="en-US" smtClean="0"/>
-              <a:t>5</a:t>
+              <a:t>6</a:t>
             </a:fld>
             <a:endParaRPr lang="zh-CN" altLang="en-US"/>
           </a:p>
@@ -7106,6 +7108,76 @@
           </a:fontRef>
         </p:style>
       </p:cxnSp>
+      <p:sp>
+        <p:nvSpPr>
+          <p:cNvPr id="8" name="文本框 7">
+            <a:extLst>
+              <a:ext uri="{FF2B5EF4-FFF2-40B4-BE49-F238E27FC236}">
+                <a16:creationId xmlns:a16="http://schemas.microsoft.com/office/drawing/2014/main" id="{C764D72A-F62A-39D3-4664-3F57839C5EFD}"/>
+              </a:ext>
+            </a:extLst>
+          </p:cNvPr>
+          <p:cNvSpPr txBox="1"/>
+          <p:nvPr/>
+        </p:nvSpPr>
+        <p:spPr>
+          <a:xfrm>
+            <a:off x="7995243" y="4097261"/>
+            <a:ext cx="1694695" cy="230832"/>
+          </a:xfrm>
+          <a:prstGeom prst="rect">
+            <a:avLst/>
+          </a:prstGeom>
+          <a:noFill/>
+        </p:spPr>
+        <p:txBody>
+          <a:bodyPr wrap="none" rtlCol="0">
+            <a:spAutoFit/>
+          </a:bodyPr>
+          <a:lstStyle/>
+          <a:p>
+            <a:r>
+              <a:rPr lang="zh-CN" altLang="en-US" sz="900" dirty="0"/>
+              <a:t>存放一些前端使用的工具函数</a:t>
+            </a:r>
+          </a:p>
+        </p:txBody>
+      </p:sp>
+      <p:sp>
+        <p:nvSpPr>
+          <p:cNvPr id="14" name="文本框 13">
+            <a:extLst>
+              <a:ext uri="{FF2B5EF4-FFF2-40B4-BE49-F238E27FC236}">
+                <a16:creationId xmlns:a16="http://schemas.microsoft.com/office/drawing/2014/main" id="{8756BB85-456B-DCDB-5DB0-B17DD1FCC382}"/>
+              </a:ext>
+            </a:extLst>
+          </p:cNvPr>
+          <p:cNvSpPr txBox="1"/>
+          <p:nvPr/>
+        </p:nvSpPr>
+        <p:spPr>
+          <a:xfrm>
+            <a:off x="7995243" y="4621394"/>
+            <a:ext cx="1223412" cy="230832"/>
+          </a:xfrm>
+          <a:prstGeom prst="rect">
+            <a:avLst/>
+          </a:prstGeom>
+          <a:noFill/>
+        </p:spPr>
+        <p:txBody>
+          <a:bodyPr wrap="none" rtlCol="0">
+            <a:spAutoFit/>
+          </a:bodyPr>
+          <a:lstStyle/>
+          <a:p>
+            <a:r>
+              <a:rPr lang="zh-CN" altLang="en-US" sz="900" dirty="0"/>
+              <a:t>管理当前界面的状态</a:t>
+            </a:r>
+          </a:p>
+        </p:txBody>
+      </p:sp>
     </p:spTree>
     <p:extLst>
       <p:ext uri="{BB962C8B-B14F-4D97-AF65-F5344CB8AC3E}">
@@ -9214,14 +9286,14 @@
           <a:p>
             <a:pPr algn="ctr"/>
             <a:r>
-              <a:rPr lang="zh-CN" altLang="en-US" sz="1400" dirty="0">
+              <a:rPr lang="zh-CN" altLang="en-US" sz="1400" b="1" dirty="0">
                 <a:solidFill>
                   <a:schemeClr val="tx1"/>
                 </a:solidFill>
               </a:rPr>
               <a:t>最终回答生成请求</a:t>
             </a:r>
-            <a:endParaRPr lang="en-US" altLang="zh-CN" sz="1400" dirty="0">
+            <a:endParaRPr lang="en-US" altLang="zh-CN" sz="1400" b="1" dirty="0">
               <a:solidFill>
                 <a:schemeClr val="tx1"/>
               </a:solidFill>
@@ -10574,6 +10646,140 @@
           </a:fillRef>
           <a:effectRef idx="1">
             <a:schemeClr val="accent1"/>
+          </a:effectRef>
+          <a:fontRef idx="minor">
+            <a:schemeClr val="tx1"/>
+          </a:fontRef>
+        </p:style>
+      </p:cxnSp>
+      <p:sp>
+        <p:nvSpPr>
+          <p:cNvPr id="2" name="椭圆 1">
+            <a:extLst>
+              <a:ext uri="{FF2B5EF4-FFF2-40B4-BE49-F238E27FC236}">
+                <a16:creationId xmlns:a16="http://schemas.microsoft.com/office/drawing/2014/main" id="{C15977E6-9312-24C1-6C89-A242F66700C5}"/>
+              </a:ext>
+            </a:extLst>
+          </p:cNvPr>
+          <p:cNvSpPr/>
+          <p:nvPr/>
+        </p:nvSpPr>
+        <p:spPr>
+          <a:xfrm>
+            <a:off x="414867" y="4548996"/>
+            <a:ext cx="955728" cy="1852430"/>
+          </a:xfrm>
+          <a:prstGeom prst="ellipse">
+            <a:avLst/>
+          </a:prstGeom>
+          <a:solidFill>
+            <a:schemeClr val="accent2"/>
+          </a:solidFill>
+        </p:spPr>
+        <p:style>
+          <a:lnRef idx="2">
+            <a:schemeClr val="accent1">
+              <a:shade val="15000"/>
+            </a:schemeClr>
+          </a:lnRef>
+          <a:fillRef idx="1">
+            <a:schemeClr val="accent1"/>
+          </a:fillRef>
+          <a:effectRef idx="0">
+            <a:schemeClr val="accent1"/>
+          </a:effectRef>
+          <a:fontRef idx="minor">
+            <a:schemeClr val="lt1"/>
+          </a:fontRef>
+        </p:style>
+        <p:txBody>
+          <a:bodyPr rtlCol="0" anchor="ctr"/>
+          <a:lstStyle/>
+          <a:p>
+            <a:pPr algn="ctr"/>
+            <a:r>
+              <a:rPr lang="zh-CN" altLang="en-US" dirty="0"/>
+              <a:t>异步更新策略</a:t>
+            </a:r>
+          </a:p>
+        </p:txBody>
+      </p:sp>
+      <p:cxnSp>
+        <p:nvCxnSpPr>
+          <p:cNvPr id="4" name="直接箭头连接符 3">
+            <a:extLst>
+              <a:ext uri="{FF2B5EF4-FFF2-40B4-BE49-F238E27FC236}">
+                <a16:creationId xmlns:a16="http://schemas.microsoft.com/office/drawing/2014/main" id="{C3096029-89B8-9E18-5DD2-3EA78F258F4A}"/>
+              </a:ext>
+            </a:extLst>
+          </p:cNvPr>
+          <p:cNvCxnSpPr>
+            <a:cxnSpLocks/>
+          </p:cNvCxnSpPr>
+          <p:nvPr/>
+        </p:nvCxnSpPr>
+        <p:spPr>
+          <a:xfrm>
+            <a:off x="4405745" y="297051"/>
+            <a:ext cx="752856" cy="4376619"/>
+          </a:xfrm>
+          <a:prstGeom prst="straightConnector1">
+            <a:avLst/>
+          </a:prstGeom>
+          <a:ln>
+            <a:tailEnd type="triangle"/>
+          </a:ln>
+        </p:spPr>
+        <p:style>
+          <a:lnRef idx="2">
+            <a:schemeClr val="accent2"/>
+          </a:lnRef>
+          <a:fillRef idx="0">
+            <a:schemeClr val="accent2"/>
+          </a:fillRef>
+          <a:effectRef idx="1">
+            <a:schemeClr val="accent2"/>
+          </a:effectRef>
+          <a:fontRef idx="minor">
+            <a:schemeClr val="tx1"/>
+          </a:fontRef>
+        </p:style>
+      </p:cxnSp>
+      <p:cxnSp>
+        <p:nvCxnSpPr>
+          <p:cNvPr id="7" name="直接箭头连接符 6">
+            <a:extLst>
+              <a:ext uri="{FF2B5EF4-FFF2-40B4-BE49-F238E27FC236}">
+                <a16:creationId xmlns:a16="http://schemas.microsoft.com/office/drawing/2014/main" id="{DAD5360B-4F72-27E4-73AF-DC2DB8F48A66}"/>
+              </a:ext>
+            </a:extLst>
+          </p:cNvPr>
+          <p:cNvCxnSpPr>
+            <a:cxnSpLocks/>
+          </p:cNvCxnSpPr>
+          <p:nvPr/>
+        </p:nvCxnSpPr>
+        <p:spPr>
+          <a:xfrm flipH="1">
+            <a:off x="9975273" y="297051"/>
+            <a:ext cx="785091" cy="4251945"/>
+          </a:xfrm>
+          <a:prstGeom prst="straightConnector1">
+            <a:avLst/>
+          </a:prstGeom>
+          <a:ln>
+            <a:tailEnd type="triangle"/>
+          </a:ln>
+        </p:spPr>
+        <p:style>
+          <a:lnRef idx="2">
+            <a:schemeClr val="accent2"/>
+          </a:lnRef>
+          <a:fillRef idx="0">
+            <a:schemeClr val="accent2"/>
+          </a:fillRef>
+          <a:effectRef idx="1">
+            <a:schemeClr val="accent2"/>
           </a:effectRef>
           <a:fontRef idx="minor">
             <a:schemeClr val="tx1"/>
@@ -11395,6 +11601,230 @@
   <p:cSld>
     <p:spTree>
       <p:nvGrpSpPr>
+        <p:cNvPr id="1" name=""/>
+        <p:cNvGrpSpPr/>
+        <p:nvPr/>
+      </p:nvGrpSpPr>
+      <p:grpSpPr>
+        <a:xfrm>
+          <a:off x="0" y="0"/>
+          <a:ext cx="0" cy="0"/>
+          <a:chOff x="0" y="0"/>
+          <a:chExt cx="0" cy="0"/>
+        </a:xfrm>
+      </p:grpSpPr>
+      <p:sp>
+        <p:nvSpPr>
+          <p:cNvPr id="4" name="文本框 3">
+            <a:extLst>
+              <a:ext uri="{FF2B5EF4-FFF2-40B4-BE49-F238E27FC236}">
+                <a16:creationId xmlns:a16="http://schemas.microsoft.com/office/drawing/2014/main" id="{3E912F7F-43D5-B8C8-8309-41BDE83D45DC}"/>
+              </a:ext>
+            </a:extLst>
+          </p:cNvPr>
+          <p:cNvSpPr txBox="1"/>
+          <p:nvPr/>
+        </p:nvSpPr>
+        <p:spPr>
+          <a:xfrm>
+            <a:off x="899698" y="645191"/>
+            <a:ext cx="2236510" cy="707886"/>
+          </a:xfrm>
+          <a:prstGeom prst="rect">
+            <a:avLst/>
+          </a:prstGeom>
+          <a:noFill/>
+        </p:spPr>
+        <p:txBody>
+          <a:bodyPr wrap="none" rtlCol="0">
+            <a:spAutoFit/>
+          </a:bodyPr>
+          <a:lstStyle/>
+          <a:p>
+            <a:r>
+              <a:rPr lang="zh-CN" altLang="en-US" sz="4000" b="1" dirty="0"/>
+              <a:t>多端使用</a:t>
+            </a:r>
+            <a:endParaRPr lang="zh-CN" altLang="zh-CN" sz="4000" b="1" dirty="0"/>
+          </a:p>
+        </p:txBody>
+      </p:sp>
+      <p:sp>
+        <p:nvSpPr>
+          <p:cNvPr id="9" name="文本框 8">
+            <a:extLst>
+              <a:ext uri="{FF2B5EF4-FFF2-40B4-BE49-F238E27FC236}">
+                <a16:creationId xmlns:a16="http://schemas.microsoft.com/office/drawing/2014/main" id="{88368C2F-906E-2F70-2492-992B06DEA012}"/>
+              </a:ext>
+            </a:extLst>
+          </p:cNvPr>
+          <p:cNvSpPr txBox="1"/>
+          <p:nvPr/>
+        </p:nvSpPr>
+        <p:spPr>
+          <a:xfrm>
+            <a:off x="4092448" y="852676"/>
+            <a:ext cx="5010912" cy="523220"/>
+          </a:xfrm>
+          <a:prstGeom prst="rect">
+            <a:avLst/>
+          </a:prstGeom>
+          <a:noFill/>
+        </p:spPr>
+        <p:txBody>
+          <a:bodyPr wrap="square" rtlCol="0">
+            <a:spAutoFit/>
+          </a:bodyPr>
+          <a:lstStyle/>
+          <a:p>
+            <a:r>
+              <a:rPr lang="zh-CN" altLang="en-US" sz="2800" dirty="0"/>
+              <a:t>手机以及平板的界面</a:t>
+            </a:r>
+          </a:p>
+        </p:txBody>
+      </p:sp>
+      <p:sp>
+        <p:nvSpPr>
+          <p:cNvPr id="2" name="文本框 1">
+            <a:extLst>
+              <a:ext uri="{FF2B5EF4-FFF2-40B4-BE49-F238E27FC236}">
+                <a16:creationId xmlns:a16="http://schemas.microsoft.com/office/drawing/2014/main" id="{3B3F2153-789F-8AAA-ABDC-C6A46CE0D6D4}"/>
+              </a:ext>
+            </a:extLst>
+          </p:cNvPr>
+          <p:cNvSpPr txBox="1"/>
+          <p:nvPr/>
+        </p:nvSpPr>
+        <p:spPr>
+          <a:xfrm>
+            <a:off x="4153408" y="341745"/>
+            <a:ext cx="7494359" cy="369332"/>
+          </a:xfrm>
+          <a:prstGeom prst="rect">
+            <a:avLst/>
+          </a:prstGeom>
+          <a:noFill/>
+        </p:spPr>
+        <p:txBody>
+          <a:bodyPr wrap="none" rtlCol="0">
+            <a:spAutoFit/>
+          </a:bodyPr>
+          <a:lstStyle/>
+          <a:p>
+            <a:r>
+              <a:rPr lang="zh-CN" altLang="en-US" dirty="0"/>
+              <a:t>通过检测设备类型，使用</a:t>
+            </a:r>
+            <a:r>
+              <a:rPr lang="en-US" altLang="zh-CN" dirty="0" err="1"/>
+              <a:t>vue</a:t>
+            </a:r>
+            <a:r>
+              <a:rPr lang="zh-CN" altLang="en-US" dirty="0"/>
+              <a:t>的条件渲染和切换</a:t>
+            </a:r>
+            <a:r>
+              <a:rPr lang="en-US" altLang="zh-CN" dirty="0"/>
+              <a:t>CSS</a:t>
+            </a:r>
+            <a:r>
+              <a:rPr lang="zh-CN" altLang="en-US" dirty="0"/>
+              <a:t>属性实现多设备适配</a:t>
+            </a:r>
+          </a:p>
+        </p:txBody>
+      </p:sp>
+      <p:pic>
+        <p:nvPicPr>
+          <p:cNvPr id="10" name="图片 9">
+            <a:extLst>
+              <a:ext uri="{FF2B5EF4-FFF2-40B4-BE49-F238E27FC236}">
+                <a16:creationId xmlns:a16="http://schemas.microsoft.com/office/drawing/2014/main" id="{663B6A50-1BC9-3502-0433-C9F65A83965E}"/>
+              </a:ext>
+            </a:extLst>
+          </p:cNvPr>
+          <p:cNvPicPr>
+            <a:picLocks noChangeAspect="1"/>
+          </p:cNvPicPr>
+          <p:nvPr/>
+        </p:nvPicPr>
+        <p:blipFill>
+          <a:blip r:embed="rId2">
+            <a:extLst>
+              <a:ext uri="{28A0092B-C50C-407E-A947-70E740481C1C}">
+                <a14:useLocalDpi xmlns:a14="http://schemas.microsoft.com/office/drawing/2010/main" val="0"/>
+              </a:ext>
+            </a:extLst>
+          </a:blip>
+          <a:stretch>
+            <a:fillRect/>
+          </a:stretch>
+        </p:blipFill>
+        <p:spPr>
+          <a:xfrm>
+            <a:off x="1007507" y="2022764"/>
+            <a:ext cx="2020892" cy="4373418"/>
+          </a:xfrm>
+          <a:prstGeom prst="rect">
+            <a:avLst/>
+          </a:prstGeom>
+        </p:spPr>
+      </p:pic>
+      <p:pic>
+        <p:nvPicPr>
+          <p:cNvPr id="12" name="图片 11">
+            <a:extLst>
+              <a:ext uri="{FF2B5EF4-FFF2-40B4-BE49-F238E27FC236}">
+                <a16:creationId xmlns:a16="http://schemas.microsoft.com/office/drawing/2014/main" id="{D7C28724-0EF6-0511-6F70-24DDA60E7C12}"/>
+              </a:ext>
+            </a:extLst>
+          </p:cNvPr>
+          <p:cNvPicPr>
+            <a:picLocks noChangeAspect="1"/>
+          </p:cNvPicPr>
+          <p:nvPr/>
+        </p:nvPicPr>
+        <p:blipFill>
+          <a:blip r:embed="rId3">
+            <a:extLst>
+              <a:ext uri="{28A0092B-C50C-407E-A947-70E740481C1C}">
+                <a14:useLocalDpi xmlns:a14="http://schemas.microsoft.com/office/drawing/2010/main" val="0"/>
+              </a:ext>
+            </a:extLst>
+          </a:blip>
+          <a:stretch>
+            <a:fillRect/>
+          </a:stretch>
+        </p:blipFill>
+        <p:spPr>
+          <a:xfrm>
+            <a:off x="4630370" y="2022764"/>
+            <a:ext cx="6554123" cy="4096327"/>
+          </a:xfrm>
+          <a:prstGeom prst="rect">
+            <a:avLst/>
+          </a:prstGeom>
+        </p:spPr>
+      </p:pic>
+    </p:spTree>
+    <p:extLst>
+      <p:ext uri="{BB962C8B-B14F-4D97-AF65-F5344CB8AC3E}">
+        <p14:creationId xmlns:p14="http://schemas.microsoft.com/office/powerpoint/2010/main" val="626992794"/>
+      </p:ext>
+    </p:extLst>
+  </p:cSld>
+  <p:clrMapOvr>
+    <a:masterClrMapping/>
+  </p:clrMapOvr>
+</p:sld>
+</file>
+
+<file path=ppt/slides/slide6.xml><?xml version="1.0" encoding="utf-8"?>
+<p:sld xmlns:a="http://schemas.openxmlformats.org/drawingml/2006/main" xmlns:r="http://schemas.openxmlformats.org/officeDocument/2006/relationships" xmlns:p="http://schemas.openxmlformats.org/presentationml/2006/main">
+  <p:cSld>
+    <p:spTree>
+      <p:nvGrpSpPr>
         <p:cNvPr id="1" name="">
           <a:extLst>
             <a:ext uri="{FF2B5EF4-FFF2-40B4-BE49-F238E27FC236}">
@@ -11462,8 +11892,8 @@
         </p:nvGrpSpPr>
         <p:grpSpPr>
           <a:xfrm>
-            <a:off x="7137990" y="2107339"/>
-            <a:ext cx="4763386" cy="4058093"/>
+            <a:off x="6520262" y="1773169"/>
+            <a:ext cx="4956000" cy="4261871"/>
             <a:chOff x="6204991" y="1813140"/>
             <a:chExt cx="5375588" cy="4807194"/>
           </a:xfrm>
@@ -11841,8 +12271,8 @@
         </p:nvSpPr>
         <p:spPr>
           <a:xfrm>
-            <a:off x="5704013" y="1959192"/>
-            <a:ext cx="1973580" cy="365760"/>
+            <a:off x="6520262" y="1362552"/>
+            <a:ext cx="2432115" cy="365760"/>
           </a:xfrm>
           <a:prstGeom prst="rect">
             <a:avLst/>
@@ -11857,7 +12287,7 @@
               <a:buNone/>
             </a:pPr>
             <a:r>
-              <a:rPr lang="en-US" sz="1500" b="1" dirty="0">
+              <a:rPr lang="en-US" sz="2400" b="1" dirty="0">
                 <a:solidFill>
                   <a:srgbClr val="0B1F3A"/>
                 </a:solidFill>
@@ -11867,7 +12297,7 @@
               </a:rPr>
               <a:t>微调后问答效果</a:t>
             </a:r>
-            <a:endParaRPr lang="en-US" sz="1500" dirty="0"/>
+            <a:endParaRPr lang="en-US" sz="2400" dirty="0"/>
           </a:p>
         </p:txBody>
       </p:sp>
@@ -11875,256 +12305,6 @@
     <p:extLst>
       <p:ext uri="{BB962C8B-B14F-4D97-AF65-F5344CB8AC3E}">
         <p14:creationId xmlns:p14="http://schemas.microsoft.com/office/powerpoint/2010/main" val="2593844675"/>
-      </p:ext>
-    </p:extLst>
-  </p:cSld>
-  <p:clrMapOvr>
-    <a:masterClrMapping/>
-  </p:clrMapOvr>
-</p:sld>
-</file>
-
-<file path=ppt/slides/slide6.xml><?xml version="1.0" encoding="utf-8"?>
-<p:sld xmlns:a="http://schemas.openxmlformats.org/drawingml/2006/main" xmlns:r="http://schemas.openxmlformats.org/officeDocument/2006/relationships" xmlns:p="http://schemas.openxmlformats.org/presentationml/2006/main">
-  <p:cSld>
-    <p:spTree>
-      <p:nvGrpSpPr>
-        <p:cNvPr id="1" name=""/>
-        <p:cNvGrpSpPr/>
-        <p:nvPr/>
-      </p:nvGrpSpPr>
-      <p:grpSpPr>
-        <a:xfrm>
-          <a:off x="0" y="0"/>
-          <a:ext cx="0" cy="0"/>
-          <a:chOff x="0" y="0"/>
-          <a:chExt cx="0" cy="0"/>
-        </a:xfrm>
-      </p:grpSpPr>
-      <p:sp>
-        <p:nvSpPr>
-          <p:cNvPr id="30" name="文本框 29">
-            <a:extLst>
-              <a:ext uri="{FF2B5EF4-FFF2-40B4-BE49-F238E27FC236}">
-                <a16:creationId xmlns:a16="http://schemas.microsoft.com/office/drawing/2014/main" id="{476DCF06-EF95-9693-64DC-5141597B674E}"/>
-              </a:ext>
-            </a:extLst>
-          </p:cNvPr>
-          <p:cNvSpPr txBox="1"/>
-          <p:nvPr/>
-        </p:nvSpPr>
-        <p:spPr>
-          <a:xfrm>
-            <a:off x="144178" y="93626"/>
-            <a:ext cx="2738250" cy="523220"/>
-          </a:xfrm>
-          <a:prstGeom prst="rect">
-            <a:avLst/>
-          </a:prstGeom>
-          <a:noFill/>
-        </p:spPr>
-        <p:txBody>
-          <a:bodyPr wrap="none" rtlCol="0">
-            <a:spAutoFit/>
-          </a:bodyPr>
-          <a:lstStyle/>
-          <a:p>
-            <a:r>
-              <a:rPr lang="zh-CN" altLang="en-US" sz="2800" b="1" dirty="0"/>
-              <a:t>不足和未来工作</a:t>
-            </a:r>
-          </a:p>
-        </p:txBody>
-      </p:sp>
-      <p:sp>
-        <p:nvSpPr>
-          <p:cNvPr id="2" name="文本框 1">
-            <a:extLst>
-              <a:ext uri="{FF2B5EF4-FFF2-40B4-BE49-F238E27FC236}">
-                <a16:creationId xmlns:a16="http://schemas.microsoft.com/office/drawing/2014/main" id="{7C45BED0-BB45-EBD2-7872-FCC75BEBE160}"/>
-              </a:ext>
-            </a:extLst>
-          </p:cNvPr>
-          <p:cNvSpPr txBox="1"/>
-          <p:nvPr/>
-        </p:nvSpPr>
-        <p:spPr>
-          <a:xfrm>
-            <a:off x="144178" y="782128"/>
-            <a:ext cx="10905550" cy="3139321"/>
-          </a:xfrm>
-          <a:prstGeom prst="rect">
-            <a:avLst/>
-          </a:prstGeom>
-          <a:noFill/>
-        </p:spPr>
-        <p:txBody>
-          <a:bodyPr wrap="none" rtlCol="0">
-            <a:spAutoFit/>
-          </a:bodyPr>
-          <a:lstStyle/>
-          <a:p>
-            <a:pPr marL="342900" indent="-342900">
-              <a:buAutoNum type="arabicPeriod"/>
-            </a:pPr>
-            <a:r>
-              <a:rPr lang="zh-CN" altLang="en-US" dirty="0"/>
-              <a:t>完善上下文 </a:t>
-            </a:r>
-            <a:r>
-              <a:rPr lang="en-US" altLang="zh-CN" dirty="0"/>
-              <a:t>token </a:t>
-            </a:r>
-            <a:r>
-              <a:rPr lang="zh-CN" altLang="en-US" dirty="0"/>
-              <a:t>管理：当前 </a:t>
-            </a:r>
-            <a:r>
-              <a:rPr lang="en-US" altLang="zh-CN" dirty="0"/>
-              <a:t>token </a:t>
-            </a:r>
-            <a:r>
-              <a:rPr lang="zh-CN" altLang="en-US" dirty="0"/>
-              <a:t>预算主要覆盖用户问题、历史消息与知识库上下文，后续可将工具</a:t>
-            </a:r>
-            <a:endParaRPr lang="en-US" altLang="zh-CN" dirty="0"/>
-          </a:p>
-          <a:p>
-            <a:r>
-              <a:rPr lang="zh-CN" altLang="en-US" dirty="0"/>
-              <a:t>定义、工具调用参数和工具返回结果也纳入统一预算控制。</a:t>
-            </a:r>
-          </a:p>
-          <a:p>
-            <a:endParaRPr lang="zh-CN" altLang="en-US" dirty="0"/>
-          </a:p>
-          <a:p>
-            <a:r>
-              <a:rPr lang="en-US" altLang="zh-CN" dirty="0"/>
-              <a:t>2. </a:t>
-            </a:r>
-            <a:r>
-              <a:rPr lang="zh-CN" altLang="en-US" dirty="0"/>
-              <a:t>增强 </a:t>
-            </a:r>
-            <a:r>
-              <a:rPr lang="en-US" altLang="zh-CN" dirty="0"/>
-              <a:t>Agent </a:t>
-            </a:r>
-            <a:r>
-              <a:rPr lang="zh-CN" altLang="en-US" dirty="0"/>
-              <a:t>推理框架：后续可引入 </a:t>
-            </a:r>
-            <a:r>
-              <a:rPr lang="en-US" altLang="zh-CN" dirty="0" err="1"/>
-              <a:t>ReAct</a:t>
-            </a:r>
-            <a:r>
-              <a:rPr lang="zh-CN" altLang="en-US" dirty="0"/>
-              <a:t>、</a:t>
-            </a:r>
-            <a:r>
-              <a:rPr lang="en-US" altLang="zh-CN" dirty="0" err="1"/>
-              <a:t>CoT</a:t>
-            </a:r>
-            <a:r>
-              <a:rPr lang="en-US" altLang="zh-CN" dirty="0"/>
-              <a:t> </a:t>
-            </a:r>
-            <a:r>
-              <a:rPr lang="zh-CN" altLang="en-US" dirty="0"/>
-              <a:t>或更结构化的多步规划机制，提高复杂任务下的工具选</a:t>
-            </a:r>
-            <a:endParaRPr lang="en-US" altLang="zh-CN" dirty="0"/>
-          </a:p>
-          <a:p>
-            <a:r>
-              <a:rPr lang="zh-CN" altLang="en-US" dirty="0"/>
-              <a:t>择、调用顺序和错误恢复能力。</a:t>
-            </a:r>
-          </a:p>
-          <a:p>
-            <a:endParaRPr lang="zh-CN" altLang="en-US" dirty="0"/>
-          </a:p>
-          <a:p>
-            <a:r>
-              <a:rPr lang="en-US" altLang="zh-CN" dirty="0"/>
-              <a:t>3. </a:t>
-            </a:r>
-            <a:r>
-              <a:rPr lang="zh-CN" altLang="en-US" dirty="0"/>
-              <a:t>提升本地数据安全：对本地保存的 </a:t>
-            </a:r>
-            <a:r>
-              <a:rPr lang="en-US" altLang="zh-CN" dirty="0"/>
-              <a:t>API Key</a:t>
-            </a:r>
-            <a:r>
-              <a:rPr lang="zh-CN" altLang="en-US" dirty="0"/>
-              <a:t>、</a:t>
-            </a:r>
-            <a:r>
-              <a:rPr lang="en-US" altLang="zh-CN" dirty="0"/>
-              <a:t>Steam Key</a:t>
-            </a:r>
-            <a:r>
-              <a:rPr lang="zh-CN" altLang="en-US" dirty="0"/>
-              <a:t>、用户配置和聊天历史进行加密存储，并完善敏</a:t>
-            </a:r>
-            <a:endParaRPr lang="en-US" altLang="zh-CN" dirty="0"/>
-          </a:p>
-          <a:p>
-            <a:r>
-              <a:rPr lang="zh-CN" altLang="en-US" dirty="0"/>
-              <a:t>感日志脱敏机制。</a:t>
-            </a:r>
-          </a:p>
-          <a:p>
-            <a:endParaRPr lang="zh-CN" altLang="en-US" dirty="0"/>
-          </a:p>
-          <a:p>
-            <a:r>
-              <a:rPr lang="en-US" altLang="zh-CN" dirty="0"/>
-              <a:t>4. </a:t>
-            </a:r>
-            <a:r>
-              <a:rPr lang="zh-CN" altLang="en-US" dirty="0"/>
-              <a:t>完善工程化能力：补充自动化测试、端到端测试、</a:t>
-            </a:r>
-            <a:r>
-              <a:rPr lang="en-US" altLang="zh-CN" dirty="0"/>
-              <a:t>CI/CD</a:t>
-            </a:r>
-            <a:r>
-              <a:rPr lang="zh-CN" altLang="en-US" dirty="0"/>
-              <a:t>、</a:t>
-            </a:r>
-            <a:r>
-              <a:rPr lang="en-US" altLang="zh-CN" dirty="0"/>
-              <a:t>Docker Compose </a:t>
-            </a:r>
-            <a:r>
-              <a:rPr lang="zh-CN" altLang="en-US" dirty="0"/>
-              <a:t>一键启动，以及前后端与 </a:t>
-            </a:r>
-            <a:endParaRPr lang="en-US" altLang="zh-CN" dirty="0"/>
-          </a:p>
-          <a:p>
-            <a:r>
-              <a:rPr lang="en-US" altLang="zh-CN" dirty="0"/>
-              <a:t>MCP Server </a:t>
-            </a:r>
-            <a:r>
-              <a:rPr lang="zh-CN" altLang="en-US" dirty="0"/>
-              <a:t>的健康检查和日志面板。</a:t>
-            </a:r>
-          </a:p>
-        </p:txBody>
-      </p:sp>
-    </p:spTree>
-    <p:extLst>
-      <p:ext uri="{BB962C8B-B14F-4D97-AF65-F5344CB8AC3E}">
-        <p14:creationId xmlns:p14="http://schemas.microsoft.com/office/powerpoint/2010/main" val="1661350750"/>
       </p:ext>
     </p:extLst>
   </p:cSld>
@@ -12151,6 +12331,434 @@
           <a:chExt cx="0" cy="0"/>
         </a:xfrm>
       </p:grpSpPr>
+      <p:pic>
+        <p:nvPicPr>
+          <p:cNvPr id="6" name="内容占位符 5">
+            <a:extLst>
+              <a:ext uri="{FF2B5EF4-FFF2-40B4-BE49-F238E27FC236}">
+                <a16:creationId xmlns:a16="http://schemas.microsoft.com/office/drawing/2014/main" id="{2D68B1BC-F100-AB63-5ED3-68031D4BC231}"/>
+              </a:ext>
+            </a:extLst>
+          </p:cNvPr>
+          <p:cNvPicPr>
+            <a:picLocks noGrp="1" noChangeAspect="1"/>
+          </p:cNvPicPr>
+          <p:nvPr>
+            <p:ph idx="1"/>
+          </p:nvPr>
+        </p:nvPicPr>
+        <p:blipFill>
+          <a:blip r:embed="rId2">
+            <a:extLst>
+              <a:ext uri="{28A0092B-C50C-407E-A947-70E740481C1C}">
+                <a14:useLocalDpi xmlns:a14="http://schemas.microsoft.com/office/drawing/2010/main" val="0"/>
+              </a:ext>
+            </a:extLst>
+          </a:blip>
+          <a:stretch>
+            <a:fillRect/>
+          </a:stretch>
+        </p:blipFill>
+        <p:spPr>
+          <a:xfrm>
+            <a:off x="540512" y="4359194"/>
+            <a:ext cx="5786416" cy="2249665"/>
+          </a:xfrm>
+        </p:spPr>
+      </p:pic>
+      <p:pic>
+        <p:nvPicPr>
+          <p:cNvPr id="10" name="图片 9">
+            <a:extLst>
+              <a:ext uri="{FF2B5EF4-FFF2-40B4-BE49-F238E27FC236}">
+                <a16:creationId xmlns:a16="http://schemas.microsoft.com/office/drawing/2014/main" id="{589A2A8E-3966-5A4A-8251-7E3D1B57AFD0}"/>
+              </a:ext>
+            </a:extLst>
+          </p:cNvPr>
+          <p:cNvPicPr>
+            <a:picLocks noChangeAspect="1"/>
+          </p:cNvPicPr>
+          <p:nvPr/>
+        </p:nvPicPr>
+        <p:blipFill>
+          <a:blip r:embed="rId3">
+            <a:extLst>
+              <a:ext uri="{28A0092B-C50C-407E-A947-70E740481C1C}">
+                <a14:useLocalDpi xmlns:a14="http://schemas.microsoft.com/office/drawing/2010/main" val="0"/>
+              </a:ext>
+            </a:extLst>
+          </a:blip>
+          <a:stretch>
+            <a:fillRect/>
+          </a:stretch>
+        </p:blipFill>
+        <p:spPr>
+          <a:xfrm>
+            <a:off x="551885" y="1946015"/>
+            <a:ext cx="5763670" cy="1995539"/>
+          </a:xfrm>
+          <a:prstGeom prst="rect">
+            <a:avLst/>
+          </a:prstGeom>
+        </p:spPr>
+      </p:pic>
+      <p:sp>
+        <p:nvSpPr>
+          <p:cNvPr id="11" name="文本框 10">
+            <a:extLst>
+              <a:ext uri="{FF2B5EF4-FFF2-40B4-BE49-F238E27FC236}">
+                <a16:creationId xmlns:a16="http://schemas.microsoft.com/office/drawing/2014/main" id="{5636FBB4-4036-369E-828E-B6748149DD56}"/>
+              </a:ext>
+            </a:extLst>
+          </p:cNvPr>
+          <p:cNvSpPr txBox="1"/>
+          <p:nvPr/>
+        </p:nvSpPr>
+        <p:spPr>
+          <a:xfrm>
+            <a:off x="760415" y="621792"/>
+            <a:ext cx="3421888" cy="523220"/>
+          </a:xfrm>
+          <a:prstGeom prst="rect">
+            <a:avLst/>
+          </a:prstGeom>
+          <a:noFill/>
+        </p:spPr>
+        <p:txBody>
+          <a:bodyPr wrap="square" rtlCol="0">
+            <a:spAutoFit/>
+          </a:bodyPr>
+          <a:lstStyle/>
+          <a:p>
+            <a:r>
+              <a:rPr lang="zh-CN" altLang="en-US" sz="2800" dirty="0"/>
+              <a:t>问题展示</a:t>
+            </a:r>
+          </a:p>
+        </p:txBody>
+      </p:sp>
+      <p:sp>
+        <p:nvSpPr>
+          <p:cNvPr id="12" name="文本框 11">
+            <a:extLst>
+              <a:ext uri="{FF2B5EF4-FFF2-40B4-BE49-F238E27FC236}">
+                <a16:creationId xmlns:a16="http://schemas.microsoft.com/office/drawing/2014/main" id="{0C9BBCF9-F003-1A3F-25AB-2CC572886682}"/>
+              </a:ext>
+            </a:extLst>
+          </p:cNvPr>
+          <p:cNvSpPr txBox="1"/>
+          <p:nvPr/>
+        </p:nvSpPr>
+        <p:spPr>
+          <a:xfrm>
+            <a:off x="6782816" y="621792"/>
+            <a:ext cx="4868672" cy="5909310"/>
+          </a:xfrm>
+          <a:prstGeom prst="rect">
+            <a:avLst/>
+          </a:prstGeom>
+          <a:noFill/>
+        </p:spPr>
+        <p:txBody>
+          <a:bodyPr wrap="square" rtlCol="0">
+            <a:spAutoFit/>
+          </a:bodyPr>
+          <a:lstStyle/>
+          <a:p>
+            <a:pPr algn="just"/>
+            <a:r>
+              <a:rPr lang="zh-CN" altLang="en-US" b="1" dirty="0">
+                <a:solidFill>
+                  <a:srgbClr val="FF0000"/>
+                </a:solidFill>
+              </a:rPr>
+              <a:t>现象：</a:t>
+            </a:r>
+            <a:r>
+              <a:rPr lang="en-US" altLang="zh-CN" b="1" dirty="0">
+                <a:solidFill>
+                  <a:srgbClr val="FF0000"/>
+                </a:solidFill>
+              </a:rPr>
+              <a:t>AI </a:t>
+            </a:r>
+            <a:r>
+              <a:rPr lang="zh-CN" altLang="en-US" b="1" dirty="0">
+                <a:solidFill>
+                  <a:srgbClr val="FF0000"/>
+                </a:solidFill>
+              </a:rPr>
+              <a:t>回复末尾附带幻觉代码片段</a:t>
+            </a:r>
+          </a:p>
+          <a:p>
+            <a:pPr algn="just"/>
+            <a:endParaRPr lang="zh-CN" altLang="en-US" dirty="0"/>
+          </a:p>
+          <a:p>
+            <a:pPr algn="just"/>
+            <a:r>
+              <a:rPr lang="zh-CN" altLang="en-US" dirty="0"/>
+              <a:t>根因：微调模型 </a:t>
+            </a:r>
+            <a:r>
+              <a:rPr lang="en-US" altLang="zh-CN" dirty="0"/>
+              <a:t>game-assistant</a:t>
+            </a:r>
+            <a:r>
+              <a:rPr lang="zh-CN" altLang="en-US" dirty="0"/>
+              <a:t>（</a:t>
+            </a:r>
+            <a:r>
+              <a:rPr lang="en-US" altLang="zh-CN" dirty="0"/>
+              <a:t>1.5B</a:t>
+            </a:r>
+            <a:r>
+              <a:rPr lang="zh-CN" altLang="en-US" dirty="0"/>
+              <a:t>）不支持 </a:t>
+            </a:r>
+            <a:r>
+              <a:rPr lang="en-US" altLang="zh-CN" dirty="0" err="1"/>
+              <a:t>Ollama</a:t>
+            </a:r>
+            <a:r>
+              <a:rPr lang="en-US" altLang="zh-CN" dirty="0"/>
+              <a:t> </a:t>
+            </a:r>
+            <a:r>
+              <a:rPr lang="zh-CN" altLang="en-US" dirty="0"/>
+              <a:t>原生 </a:t>
+            </a:r>
+            <a:r>
+              <a:rPr lang="en-US" altLang="zh-CN" dirty="0"/>
+              <a:t>function calling</a:t>
+            </a:r>
+            <a:r>
+              <a:rPr lang="zh-CN" altLang="en-US" dirty="0"/>
+              <a:t>，模型把工具调用输出成了 </a:t>
+            </a:r>
+            <a:r>
+              <a:rPr lang="en-US" altLang="zh-CN" dirty="0"/>
+              <a:t>Python </a:t>
+            </a:r>
+            <a:r>
+              <a:rPr lang="zh-CN" altLang="en-US" dirty="0"/>
+              <a:t>伪代码</a:t>
+            </a:r>
+          </a:p>
+          <a:p>
+            <a:pPr algn="just"/>
+            <a:endParaRPr lang="zh-CN" altLang="en-US" dirty="0"/>
+          </a:p>
+          <a:p>
+            <a:pPr algn="just"/>
+            <a:r>
+              <a:rPr lang="zh-CN" altLang="en-US" b="1" dirty="0"/>
+              <a:t>解决：切回 </a:t>
+            </a:r>
+            <a:r>
+              <a:rPr lang="en-US" altLang="zh-CN" b="1" dirty="0"/>
+              <a:t>qwen3:8b</a:t>
+            </a:r>
+            <a:r>
+              <a:rPr lang="zh-CN" altLang="en-US" b="1" dirty="0"/>
+              <a:t>（原生支持 </a:t>
+            </a:r>
+            <a:r>
+              <a:rPr lang="en-US" altLang="zh-CN" b="1" dirty="0" err="1"/>
+              <a:t>tool_calls</a:t>
+            </a:r>
+            <a:r>
+              <a:rPr lang="zh-CN" altLang="en-US" b="1" dirty="0"/>
+              <a:t>），风格靠 </a:t>
+            </a:r>
+            <a:r>
+              <a:rPr lang="en-US" altLang="zh-CN" b="1" dirty="0"/>
+              <a:t>System Prompt </a:t>
+            </a:r>
+            <a:r>
+              <a:rPr lang="zh-CN" altLang="en-US" b="1" dirty="0"/>
+              <a:t>驱动</a:t>
+            </a:r>
+          </a:p>
+          <a:p>
+            <a:pPr algn="just"/>
+            <a:endParaRPr lang="zh-CN" altLang="en-US" dirty="0"/>
+          </a:p>
+          <a:p>
+            <a:pPr algn="just"/>
+            <a:r>
+              <a:rPr lang="zh-CN" altLang="en-US" b="1" dirty="0">
+                <a:solidFill>
+                  <a:srgbClr val="FF0000"/>
+                </a:solidFill>
+              </a:rPr>
+              <a:t>现象：</a:t>
+            </a:r>
+            <a:r>
+              <a:rPr lang="en-US" altLang="zh-CN" b="1" dirty="0">
+                <a:solidFill>
+                  <a:srgbClr val="FF0000"/>
+                </a:solidFill>
+              </a:rPr>
+              <a:t>MCP </a:t>
+            </a:r>
+            <a:r>
+              <a:rPr lang="zh-CN" altLang="en-US" b="1" dirty="0">
+                <a:solidFill>
+                  <a:srgbClr val="FF0000"/>
+                </a:solidFill>
+              </a:rPr>
+              <a:t>工具被正确触发，但结果始终为 </a:t>
+            </a:r>
+            <a:r>
+              <a:rPr lang="en-US" altLang="zh-CN" b="1" dirty="0">
+                <a:solidFill>
+                  <a:srgbClr val="FF0000"/>
+                </a:solidFill>
+              </a:rPr>
+              <a:t>"fetch failed"</a:t>
+            </a:r>
+          </a:p>
+          <a:p>
+            <a:pPr algn="just"/>
+            <a:endParaRPr lang="en-US" altLang="zh-CN" dirty="0"/>
+          </a:p>
+          <a:p>
+            <a:pPr algn="just"/>
+            <a:r>
+              <a:rPr lang="zh-CN" altLang="en-US" dirty="0"/>
+              <a:t>根因：</a:t>
+            </a:r>
+            <a:r>
+              <a:rPr lang="en-US" altLang="zh-CN" dirty="0"/>
+              <a:t>Steam API </a:t>
+            </a:r>
+            <a:r>
+              <a:rPr lang="zh-CN" altLang="en-US" dirty="0"/>
+              <a:t>域名在国内被墙（</a:t>
+            </a:r>
+            <a:r>
+              <a:rPr lang="en-US" altLang="zh-CN" dirty="0"/>
+              <a:t>TCP RST</a:t>
+            </a:r>
+            <a:r>
+              <a:rPr lang="zh-CN" altLang="en-US" dirty="0"/>
+              <a:t>），三个域名全部超时：</a:t>
+            </a:r>
+          </a:p>
+          <a:p>
+            <a:pPr algn="just"/>
+            <a:endParaRPr lang="zh-CN" altLang="en-US" dirty="0"/>
+          </a:p>
+          <a:p>
+            <a:pPr algn="just"/>
+            <a:endParaRPr lang="zh-CN" altLang="en-US" dirty="0"/>
+          </a:p>
+          <a:p>
+            <a:pPr algn="just"/>
+            <a:r>
+              <a:rPr lang="en-US" altLang="zh-CN" dirty="0"/>
+              <a:t>api.steampowered.com   → </a:t>
+            </a:r>
+            <a:r>
+              <a:rPr lang="zh-CN" altLang="en-US" dirty="0"/>
+              <a:t>超时</a:t>
+            </a:r>
+          </a:p>
+          <a:p>
+            <a:pPr algn="just"/>
+            <a:r>
+              <a:rPr lang="en-US" altLang="zh-CN" dirty="0"/>
+              <a:t>steamcommunity.com     → </a:t>
+            </a:r>
+            <a:r>
+              <a:rPr lang="zh-CN" altLang="en-US" dirty="0"/>
+              <a:t>超时  </a:t>
+            </a:r>
+          </a:p>
+          <a:p>
+            <a:pPr algn="just"/>
+            <a:r>
+              <a:rPr lang="en-US" altLang="zh-CN" dirty="0"/>
+              <a:t>store.steampowered.com → </a:t>
+            </a:r>
+            <a:r>
+              <a:rPr lang="zh-CN" altLang="en-US" dirty="0"/>
+              <a:t>超时</a:t>
+            </a:r>
+          </a:p>
+          <a:p>
+            <a:pPr algn="just"/>
+            <a:r>
+              <a:rPr lang="zh-CN" altLang="en-US" b="1" dirty="0"/>
+              <a:t>解决：配置代理 </a:t>
+            </a:r>
+            <a:r>
+              <a:rPr lang="en-US" altLang="zh-CN" b="1" dirty="0"/>
+              <a:t>http://127.0.0.1:7890</a:t>
+            </a:r>
+            <a:r>
+              <a:rPr lang="zh-CN" altLang="en-US" b="1" dirty="0"/>
+              <a:t>（</a:t>
+            </a:r>
+            <a:r>
+              <a:rPr lang="en-US" altLang="zh-CN" b="1" dirty="0"/>
+              <a:t>Clash/V2Ray</a:t>
+            </a:r>
+            <a:r>
+              <a:rPr lang="zh-CN" altLang="en-US" b="1" dirty="0"/>
+              <a:t>），在 </a:t>
+            </a:r>
+            <a:r>
+              <a:rPr lang="en-US" altLang="zh-CN" b="1" dirty="0"/>
+              <a:t>profile </a:t>
+            </a:r>
+            <a:r>
+              <a:rPr lang="zh-CN" altLang="en-US" b="1" dirty="0"/>
+              <a:t>中加 </a:t>
+            </a:r>
+            <a:r>
+              <a:rPr lang="en-US" altLang="zh-CN" b="1" dirty="0"/>
+              <a:t>proxy </a:t>
+            </a:r>
+            <a:r>
+              <a:rPr lang="zh-CN" altLang="en-US" b="1" dirty="0"/>
+              <a:t>字段</a:t>
+            </a:r>
+          </a:p>
+        </p:txBody>
+      </p:sp>
+    </p:spTree>
+    <p:extLst>
+      <p:ext uri="{BB962C8B-B14F-4D97-AF65-F5344CB8AC3E}">
+        <p14:creationId xmlns:p14="http://schemas.microsoft.com/office/powerpoint/2010/main" val="992606585"/>
+      </p:ext>
+    </p:extLst>
+  </p:cSld>
+  <p:clrMapOvr>
+    <a:masterClrMapping/>
+  </p:clrMapOvr>
+</p:sld>
+</file>
+
+<file path=ppt/slides/slide8.xml><?xml version="1.0" encoding="utf-8"?>
+<p:sld xmlns:a="http://schemas.openxmlformats.org/drawingml/2006/main" xmlns:r="http://schemas.openxmlformats.org/officeDocument/2006/relationships" xmlns:p="http://schemas.openxmlformats.org/presentationml/2006/main">
+  <p:cSld>
+    <p:spTree>
+      <p:nvGrpSpPr>
+        <p:cNvPr id="1" name=""/>
+        <p:cNvGrpSpPr/>
+        <p:nvPr/>
+      </p:nvGrpSpPr>
+      <p:grpSpPr>
+        <a:xfrm>
+          <a:off x="0" y="0"/>
+          <a:ext cx="0" cy="0"/>
+          <a:chOff x="0" y="0"/>
+          <a:chExt cx="0" cy="0"/>
+        </a:xfrm>
+      </p:grpSpPr>
       <p:sp>
         <p:nvSpPr>
           <p:cNvPr id="30" name="文本框 29">
@@ -12165,8 +12773,8 @@
         </p:nvSpPr>
         <p:spPr>
           <a:xfrm>
-            <a:off x="144178" y="93626"/>
-            <a:ext cx="902811" cy="523220"/>
+            <a:off x="977298" y="552858"/>
+            <a:ext cx="2738250" cy="523220"/>
           </a:xfrm>
           <a:prstGeom prst="rect">
             <a:avLst/>
@@ -12181,7 +12789,7 @@
           <a:p>
             <a:r>
               <a:rPr lang="zh-CN" altLang="en-US" sz="2800" b="1" dirty="0"/>
-              <a:t>分工</a:t>
+              <a:t>不足和未来工作</a:t>
             </a:r>
           </a:p>
         </p:txBody>
@@ -12191,7 +12799,7 @@
           <p:cNvPr id="2" name="文本框 1">
             <a:extLst>
               <a:ext uri="{FF2B5EF4-FFF2-40B4-BE49-F238E27FC236}">
-                <a16:creationId xmlns:a16="http://schemas.microsoft.com/office/drawing/2014/main" id="{32FAB2B6-64A7-D176-A4A0-EB5162B4747D}"/>
+                <a16:creationId xmlns:a16="http://schemas.microsoft.com/office/drawing/2014/main" id="{7C45BED0-BB45-EBD2-7872-FCC75BEBE160}"/>
               </a:ext>
             </a:extLst>
           </p:cNvPr>
@@ -12200,8 +12808,8 @@
         </p:nvSpPr>
         <p:spPr>
           <a:xfrm>
-            <a:off x="144178" y="897147"/>
-            <a:ext cx="3092513" cy="369332"/>
+            <a:off x="530258" y="1497392"/>
+            <a:ext cx="10905550" cy="3139321"/>
           </a:xfrm>
           <a:prstGeom prst="rect">
             <a:avLst/>
@@ -12214,17 +12822,332 @@
           </a:bodyPr>
           <a:lstStyle/>
           <a:p>
+            <a:pPr marL="342900" indent="-342900">
+              <a:buAutoNum type="arabicPeriod"/>
+            </a:pPr>
+            <a:r>
+              <a:rPr lang="zh-CN" altLang="en-US" b="1" dirty="0"/>
+              <a:t>完善上下文 </a:t>
+            </a:r>
+            <a:r>
+              <a:rPr lang="en-US" altLang="zh-CN" b="1" dirty="0"/>
+              <a:t>token </a:t>
+            </a:r>
+            <a:r>
+              <a:rPr lang="zh-CN" altLang="en-US" b="1" dirty="0"/>
+              <a:t>管理</a:t>
+            </a:r>
             <a:r>
               <a:rPr lang="zh-CN" altLang="en-US" dirty="0"/>
+              <a:t>：当前 </a:t>
+            </a:r>
+            <a:r>
+              <a:rPr lang="en-US" altLang="zh-CN" dirty="0"/>
+              <a:t>token </a:t>
+            </a:r>
+            <a:r>
+              <a:rPr lang="zh-CN" altLang="en-US" dirty="0"/>
+              <a:t>预算主要覆盖用户问题、历史消息与知识库上下文，后续可将工具</a:t>
+            </a:r>
+            <a:endParaRPr lang="en-US" altLang="zh-CN" dirty="0"/>
+          </a:p>
+          <a:p>
+            <a:r>
+              <a:rPr lang="zh-CN" altLang="en-US" dirty="0"/>
+              <a:t>定义、工具调用参数和工具返回结果也纳入统一预算控制。</a:t>
+            </a:r>
+          </a:p>
+          <a:p>
+            <a:endParaRPr lang="zh-CN" altLang="en-US" dirty="0"/>
+          </a:p>
+          <a:p>
+            <a:r>
+              <a:rPr lang="en-US" altLang="zh-CN" dirty="0"/>
+              <a:t>2. </a:t>
+            </a:r>
+            <a:r>
+              <a:rPr lang="zh-CN" altLang="en-US" b="1" dirty="0"/>
+              <a:t>增强 </a:t>
+            </a:r>
+            <a:r>
+              <a:rPr lang="en-US" altLang="zh-CN" b="1" dirty="0"/>
+              <a:t>Agent </a:t>
+            </a:r>
+            <a:r>
+              <a:rPr lang="zh-CN" altLang="en-US" b="1" dirty="0"/>
+              <a:t>推理框架</a:t>
+            </a:r>
+            <a:r>
+              <a:rPr lang="zh-CN" altLang="en-US" dirty="0"/>
+              <a:t>：后续可引入 </a:t>
+            </a:r>
+            <a:r>
+              <a:rPr lang="en-US" altLang="zh-CN" dirty="0" err="1"/>
+              <a:t>ReAct</a:t>
+            </a:r>
+            <a:r>
+              <a:rPr lang="zh-CN" altLang="en-US" dirty="0"/>
+              <a:t>、</a:t>
+            </a:r>
+            <a:r>
+              <a:rPr lang="en-US" altLang="zh-CN" dirty="0" err="1"/>
+              <a:t>CoT</a:t>
+            </a:r>
+            <a:r>
+              <a:rPr lang="en-US" altLang="zh-CN" dirty="0"/>
+              <a:t> </a:t>
+            </a:r>
+            <a:r>
+              <a:rPr lang="zh-CN" altLang="en-US" dirty="0"/>
+              <a:t>或更结构化的多步规划机制，提高复杂任务下的工具选</a:t>
+            </a:r>
+            <a:endParaRPr lang="en-US" altLang="zh-CN" dirty="0"/>
+          </a:p>
+          <a:p>
+            <a:r>
+              <a:rPr lang="zh-CN" altLang="en-US" dirty="0"/>
+              <a:t>择、调用顺序和错误恢复能力。</a:t>
+            </a:r>
+          </a:p>
+          <a:p>
+            <a:endParaRPr lang="zh-CN" altLang="en-US" dirty="0"/>
+          </a:p>
+          <a:p>
+            <a:r>
+              <a:rPr lang="en-US" altLang="zh-CN" dirty="0"/>
+              <a:t>3. </a:t>
+            </a:r>
+            <a:r>
+              <a:rPr lang="zh-CN" altLang="en-US" b="1" dirty="0"/>
+              <a:t>提升本地数据安全</a:t>
+            </a:r>
+            <a:r>
+              <a:rPr lang="zh-CN" altLang="en-US" dirty="0"/>
+              <a:t>：对本地保存的 </a:t>
+            </a:r>
+            <a:r>
+              <a:rPr lang="en-US" altLang="zh-CN" dirty="0"/>
+              <a:t>API Key</a:t>
+            </a:r>
+            <a:r>
+              <a:rPr lang="zh-CN" altLang="en-US" dirty="0"/>
+              <a:t>、</a:t>
+            </a:r>
+            <a:r>
+              <a:rPr lang="en-US" altLang="zh-CN" dirty="0"/>
+              <a:t>Steam Key</a:t>
+            </a:r>
+            <a:r>
+              <a:rPr lang="zh-CN" altLang="en-US" dirty="0"/>
+              <a:t>、用户配置和聊天历史进行加密存储，并完善敏</a:t>
+            </a:r>
+            <a:endParaRPr lang="en-US" altLang="zh-CN" dirty="0"/>
+          </a:p>
+          <a:p>
+            <a:r>
+              <a:rPr lang="zh-CN" altLang="en-US" dirty="0"/>
+              <a:t>感日志脱敏机制。</a:t>
+            </a:r>
+          </a:p>
+          <a:p>
+            <a:endParaRPr lang="zh-CN" altLang="en-US" dirty="0"/>
+          </a:p>
+          <a:p>
+            <a:r>
+              <a:rPr lang="en-US" altLang="zh-CN" dirty="0"/>
+              <a:t>4. </a:t>
+            </a:r>
+            <a:r>
+              <a:rPr lang="zh-CN" altLang="en-US" b="1" dirty="0"/>
+              <a:t>完善工程化能力</a:t>
+            </a:r>
+            <a:r>
+              <a:rPr lang="zh-CN" altLang="en-US" dirty="0"/>
+              <a:t>：补充自动化测试、端到端测试、</a:t>
+            </a:r>
+            <a:r>
+              <a:rPr lang="en-US" altLang="zh-CN" dirty="0"/>
+              <a:t>CI/CD</a:t>
+            </a:r>
+            <a:r>
+              <a:rPr lang="zh-CN" altLang="en-US" dirty="0"/>
+              <a:t>、</a:t>
+            </a:r>
+            <a:r>
+              <a:rPr lang="en-US" altLang="zh-CN" dirty="0"/>
+              <a:t>Docker Compose </a:t>
+            </a:r>
+            <a:r>
+              <a:rPr lang="zh-CN" altLang="en-US" dirty="0"/>
+              <a:t>一键启动，以及前后端与 </a:t>
+            </a:r>
+            <a:endParaRPr lang="en-US" altLang="zh-CN" dirty="0"/>
+          </a:p>
+          <a:p>
+            <a:r>
+              <a:rPr lang="en-US" altLang="zh-CN" dirty="0"/>
+              <a:t>MCP Server </a:t>
+            </a:r>
+            <a:r>
+              <a:rPr lang="zh-CN" altLang="en-US" dirty="0"/>
+              <a:t>的健康检查和日志面板。</a:t>
+            </a:r>
+          </a:p>
+        </p:txBody>
+      </p:sp>
+    </p:spTree>
+    <p:extLst>
+      <p:ext uri="{BB962C8B-B14F-4D97-AF65-F5344CB8AC3E}">
+        <p14:creationId xmlns:p14="http://schemas.microsoft.com/office/powerpoint/2010/main" val="1661350750"/>
+      </p:ext>
+    </p:extLst>
+  </p:cSld>
+  <p:clrMapOvr>
+    <a:masterClrMapping/>
+  </p:clrMapOvr>
+</p:sld>
+</file>
+
+<file path=ppt/slides/slide9.xml><?xml version="1.0" encoding="utf-8"?>
+<p:sld xmlns:a="http://schemas.openxmlformats.org/drawingml/2006/main" xmlns:r="http://schemas.openxmlformats.org/officeDocument/2006/relationships" xmlns:p="http://schemas.openxmlformats.org/presentationml/2006/main">
+  <p:cSld>
+    <p:spTree>
+      <p:nvGrpSpPr>
+        <p:cNvPr id="1" name=""/>
+        <p:cNvGrpSpPr/>
+        <p:nvPr/>
+      </p:nvGrpSpPr>
+      <p:grpSpPr>
+        <a:xfrm>
+          <a:off x="0" y="0"/>
+          <a:ext cx="0" cy="0"/>
+          <a:chOff x="0" y="0"/>
+          <a:chExt cx="0" cy="0"/>
+        </a:xfrm>
+      </p:grpSpPr>
+      <p:sp>
+        <p:nvSpPr>
+          <p:cNvPr id="30" name="文本框 29">
+            <a:extLst>
+              <a:ext uri="{FF2B5EF4-FFF2-40B4-BE49-F238E27FC236}">
+                <a16:creationId xmlns:a16="http://schemas.microsoft.com/office/drawing/2014/main" id="{476DCF06-EF95-9693-64DC-5141597B674E}"/>
+              </a:ext>
+            </a:extLst>
+          </p:cNvPr>
+          <p:cNvSpPr txBox="1"/>
+          <p:nvPr/>
+        </p:nvSpPr>
+        <p:spPr>
+          <a:xfrm>
+            <a:off x="1217074" y="1125882"/>
+            <a:ext cx="1210588" cy="707886"/>
+          </a:xfrm>
+          <a:prstGeom prst="rect">
+            <a:avLst/>
+          </a:prstGeom>
+          <a:noFill/>
+        </p:spPr>
+        <p:txBody>
+          <a:bodyPr wrap="none" rtlCol="0">
+            <a:spAutoFit/>
+          </a:bodyPr>
+          <a:lstStyle/>
+          <a:p>
+            <a:r>
+              <a:rPr lang="zh-CN" altLang="en-US" sz="4000" b="1" dirty="0"/>
+              <a:t>分工</a:t>
+            </a:r>
+          </a:p>
+        </p:txBody>
+      </p:sp>
+      <p:sp>
+        <p:nvSpPr>
+          <p:cNvPr id="2" name="文本框 1">
+            <a:extLst>
+              <a:ext uri="{FF2B5EF4-FFF2-40B4-BE49-F238E27FC236}">
+                <a16:creationId xmlns:a16="http://schemas.microsoft.com/office/drawing/2014/main" id="{32FAB2B6-64A7-D176-A4A0-EB5162B4747D}"/>
+              </a:ext>
+            </a:extLst>
+          </p:cNvPr>
+          <p:cNvSpPr txBox="1"/>
+          <p:nvPr/>
+        </p:nvSpPr>
+        <p:spPr>
+          <a:xfrm>
+            <a:off x="896018" y="2044005"/>
+            <a:ext cx="10785325" cy="1965666"/>
+          </a:xfrm>
+          <a:prstGeom prst="rect">
+            <a:avLst/>
+          </a:prstGeom>
+          <a:noFill/>
+        </p:spPr>
+        <p:txBody>
+          <a:bodyPr wrap="none" rtlCol="0">
+            <a:spAutoFit/>
+          </a:bodyPr>
+          <a:lstStyle/>
+          <a:p>
+            <a:pPr>
+              <a:lnSpc>
+                <a:spcPct val="150000"/>
+              </a:lnSpc>
+            </a:pPr>
+            <a:r>
+              <a:rPr lang="zh-CN" altLang="en-US" sz="2800" dirty="0"/>
               <a:t>卢昭阳：前后端，</a:t>
             </a:r>
             <a:r>
-              <a:rPr lang="en-US" altLang="zh-CN" dirty="0"/>
+              <a:rPr lang="en-US" altLang="zh-CN" sz="2800" dirty="0"/>
               <a:t>Agent</a:t>
             </a:r>
             <a:r>
-              <a:rPr lang="zh-CN" altLang="en-US" dirty="0"/>
+              <a:rPr lang="zh-CN" altLang="en-US" sz="2800" dirty="0"/>
               <a:t>开发</a:t>
+            </a:r>
+            <a:endParaRPr lang="en-US" altLang="zh-CN" sz="2800" dirty="0"/>
+          </a:p>
+          <a:p>
+            <a:pPr>
+              <a:lnSpc>
+                <a:spcPct val="150000"/>
+              </a:lnSpc>
+            </a:pPr>
+            <a:r>
+              <a:rPr lang="zh-CN" altLang="en-US" sz="2800" dirty="0"/>
+              <a:t>朱佳乐：</a:t>
+            </a:r>
+            <a:r>
+              <a:rPr lang="en-US" altLang="zh-CN" sz="2800" dirty="0"/>
+              <a:t> </a:t>
+            </a:r>
+            <a:r>
+              <a:rPr lang="en-US" altLang="zh-CN" sz="2800" dirty="0" err="1"/>
+              <a:t>LoRA</a:t>
+            </a:r>
+            <a:r>
+              <a:rPr lang="zh-CN" altLang="en-US" sz="2800" dirty="0"/>
+              <a:t>微调；测试优化模型，前后端功能鲁棒性；多端适配</a:t>
+            </a:r>
+            <a:endParaRPr lang="en-US" altLang="zh-CN" sz="2800" dirty="0"/>
+          </a:p>
+          <a:p>
+            <a:pPr>
+              <a:lnSpc>
+                <a:spcPct val="150000"/>
+              </a:lnSpc>
+            </a:pPr>
+            <a:r>
+              <a:rPr lang="zh-CN" altLang="en-US" sz="2800" dirty="0"/>
+              <a:t>胡启超：测试优化模型，前后端功能完整性；</a:t>
+            </a:r>
+            <a:r>
+              <a:rPr lang="en-US" altLang="zh-CN" sz="2800" dirty="0"/>
+              <a:t>MCP</a:t>
+            </a:r>
+            <a:r>
+              <a:rPr lang="zh-CN" altLang="en-US" sz="2800" dirty="0"/>
+              <a:t>工具开发</a:t>
             </a:r>
           </a:p>
         </p:txBody>

--- a/ppt.pptx
+++ b/ppt.pptx
@@ -4149,7 +4149,35 @@
             </a:r>
             <a:r>
               <a:rPr lang="zh-CN" altLang="en-US" dirty="0"/>
-              <a:t>用户的本地 </a:t>
+              <a:t>用户的</a:t>
+            </a:r>
+            <a:r>
+              <a:rPr lang="zh-CN" altLang="en-US" b="1" dirty="0"/>
+              <a:t>本地 </a:t>
+            </a:r>
+            <a:r>
+              <a:rPr lang="en-US" altLang="zh-CN" b="1" dirty="0"/>
+              <a:t>AI </a:t>
+            </a:r>
+            <a:r>
+              <a:rPr lang="zh-CN" altLang="en-US" b="1" dirty="0"/>
+              <a:t>游戏助手系统</a:t>
+            </a:r>
+            <a:r>
+              <a:rPr lang="zh-CN" altLang="en-US" dirty="0"/>
+              <a:t>，前端基于 </a:t>
+            </a:r>
+            <a:r>
+              <a:rPr lang="en-US" altLang="zh-CN" b="1" dirty="0"/>
+              <a:t>Vue 2</a:t>
+            </a:r>
+            <a:r>
+              <a:rPr lang="en-US" altLang="zh-CN" dirty="0"/>
+              <a:t> </a:t>
+            </a:r>
+            <a:r>
+              <a:rPr lang="zh-CN" altLang="en-US" dirty="0"/>
+              <a:t>构建交互界面，支持多用户档案切换、独立 </a:t>
             </a:r>
             <a:r>
               <a:rPr lang="en-US" altLang="zh-CN" dirty="0"/>
@@ -4157,22 +4185,6 @@
             </a:r>
             <a:r>
               <a:rPr lang="zh-CN" altLang="en-US" dirty="0"/>
-              <a:t>游戏助手系统，前端基于 </a:t>
-            </a:r>
-            <a:r>
-              <a:rPr lang="en-US" altLang="zh-CN" dirty="0"/>
-              <a:t>Vue 2 </a:t>
-            </a:r>
-            <a:r>
-              <a:rPr lang="zh-CN" altLang="en-US" dirty="0"/>
-              <a:t>构建交互界面，支持多用户档案切换、独立 </a:t>
-            </a:r>
-            <a:r>
-              <a:rPr lang="en-US" altLang="zh-CN" dirty="0"/>
-              <a:t>AI </a:t>
-            </a:r>
-            <a:r>
-              <a:rPr lang="zh-CN" altLang="en-US" dirty="0"/>
               <a:t>配置、</a:t>
             </a:r>
             <a:r>
@@ -4184,7 +4196,7 @@
               <a:t>数据概览和知识库管理；后端基于 </a:t>
             </a:r>
             <a:r>
-              <a:rPr lang="en-US" altLang="zh-CN" dirty="0" err="1"/>
+              <a:rPr lang="en-US" altLang="zh-CN" b="1" dirty="0" err="1"/>
               <a:t>FastAPI</a:t>
             </a:r>
             <a:r>
@@ -4204,7 +4216,7 @@
               <a:t>数据和知识库接口，并通过 </a:t>
             </a:r>
             <a:r>
-              <a:rPr lang="en-US" altLang="zh-CN" dirty="0" err="1"/>
+              <a:rPr lang="en-US" altLang="zh-CN" b="1" dirty="0" err="1"/>
               <a:t>LangChain</a:t>
             </a:r>
             <a:r>
@@ -4232,8 +4244,12 @@
               <a:t>模型实现 </a:t>
             </a:r>
             <a:r>
+              <a:rPr lang="en-US" altLang="zh-CN" b="1" dirty="0"/>
+              <a:t>RAG</a:t>
+            </a:r>
+            <a:r>
               <a:rPr lang="en-US" altLang="zh-CN" dirty="0"/>
-              <a:t>RAG </a:t>
+              <a:t> </a:t>
             </a:r>
             <a:r>
               <a:rPr lang="zh-CN" altLang="en-US" dirty="0"/>
@@ -4241,7 +4257,11 @@
             </a:r>
             <a:r>
               <a:rPr lang="en-US" altLang="zh-CN" dirty="0"/>
-              <a:t>TypeScript MCP Server</a:t>
+              <a:t>TypeScript </a:t>
+            </a:r>
+            <a:r>
+              <a:rPr lang="en-US" altLang="zh-CN" b="1" dirty="0"/>
+              <a:t>MCP Server</a:t>
             </a:r>
             <a:r>
               <a:rPr lang="zh-CN" altLang="en-US" dirty="0"/>
@@ -4840,19 +4860,6 @@
               </a:rPr>
               <a:t>Agent</a:t>
             </a:r>
-            <a:r>
-              <a:rPr lang="zh-CN" altLang="en-US" sz="1600" b="1" dirty="0">
-                <a:solidFill>
-                  <a:schemeClr val="tx1"/>
-                </a:solidFill>
-              </a:rPr>
-              <a:t>编排</a:t>
-            </a:r>
-            <a:endParaRPr lang="en-US" altLang="zh-CN" sz="1600" b="1" dirty="0">
-              <a:solidFill>
-                <a:schemeClr val="tx1"/>
-              </a:solidFill>
-            </a:endParaRPr>
           </a:p>
           <a:p>
             <a:pPr algn="ctr"/>
@@ -11722,15 +11729,31 @@
             </a:r>
             <a:r>
               <a:rPr lang="zh-CN" altLang="en-US" dirty="0"/>
-              <a:t>的条件渲染和切换</a:t>
-            </a:r>
-            <a:r>
-              <a:rPr lang="en-US" altLang="zh-CN" dirty="0"/>
+              <a:t>的</a:t>
+            </a:r>
+            <a:r>
+              <a:rPr lang="zh-CN" altLang="en-US" b="1" dirty="0"/>
+              <a:t>条件渲染</a:t>
+            </a:r>
+            <a:r>
+              <a:rPr lang="zh-CN" altLang="en-US" dirty="0"/>
+              <a:t>和</a:t>
+            </a:r>
+            <a:r>
+              <a:rPr lang="zh-CN" altLang="en-US" b="1" dirty="0"/>
+              <a:t>切换</a:t>
+            </a:r>
+            <a:r>
+              <a:rPr lang="en-US" altLang="zh-CN" b="1" dirty="0"/>
               <a:t>CSS</a:t>
             </a:r>
             <a:r>
+              <a:rPr lang="zh-CN" altLang="en-US" b="1" dirty="0"/>
+              <a:t>属性</a:t>
+            </a:r>
+            <a:r>
               <a:rPr lang="zh-CN" altLang="en-US" dirty="0"/>
-              <a:t>属性实现多设备适配</a:t>
+              <a:t>实现多设备适配</a:t>
             </a:r>
           </a:p>
         </p:txBody>
